--- a/deck/VerionX-UloX-Deck-2026.pptx
+++ b/deck/VerionX-UloX-Deck-2026.pptx
@@ -512,7 +512,7 @@
           <a:p>
             <a:r>
               <a:rPr lang="en-US" dirty="0"/>
-              <a:t>VerionX exists to equip people with know-how to maximise their potential. Two products, one ladder: Ulo builds the foundation, UloX builds the frontier skill — agentic engineering.</a:t>
+              <a:t>Open on the room. VerionX already has 80,000 students in Nigerian classrooms through Ulo. UloX is the next rung: agentic engineering, free, live in the browser.</a:t>
             </a:r>
             <a:endParaRPr lang="en-US" dirty="0"/>
           </a:p>
@@ -600,7 +600,7 @@
           <a:p>
             <a:r>
               <a:rPr lang="en-US" dirty="0"/>
-              <a:t>The ask is unchanged in size; this slide shows where UloX sits inside it.</a:t>
+              <a:t>The ask is unchanged in size; this shows where UloX sits inside it.</a:t>
             </a:r>
             <a:endParaRPr lang="en-US" dirty="0"/>
           </a:p>
@@ -688,7 +688,7 @@
           <a:p>
             <a:r>
               <a:rPr lang="en-US" dirty="0"/>
-              <a:t>Close on the mission, and send them to the live product.</a:t>
+              <a:t>Close on the room, and send them to the live product.</a:t>
             </a:r>
             <a:endParaRPr lang="en-US" dirty="0"/>
           </a:p>
@@ -776,7 +776,7 @@
           <a:p>
             <a:r>
               <a:rPr lang="en-US" dirty="0"/>
-              <a:t>The capability gap has moved. Access to AI is solved; reliability is not. That is the gap UloX is built for.</a:t>
+              <a:t>The point: access to AI is cheap now. Reliability is what teams cannot buy, and it is what nobody is teaching.</a:t>
             </a:r>
             <a:endParaRPr lang="en-US" dirty="0"/>
           </a:p>
@@ -864,7 +864,7 @@
           <a:p>
             <a:r>
               <a:rPr lang="en-US" dirty="0"/>
-              <a:t>The mission and vision are the spine. Every product decision answers to them.</a:t>
+              <a:t>Mission and vision verbatim. Ulo and UloX are two stages of the same answer.</a:t>
             </a:r>
             <a:endParaRPr lang="en-US" dirty="0"/>
           </a:p>
@@ -952,7 +952,7 @@
           <a:p>
             <a:r>
               <a:rPr lang="en-US" dirty="0"/>
-              <a:t>One continuous ladder from a child in a Nigerian classroom to an engineer shipping agents. Ulo and UloX are two rungs of the same system, not two companies.</a:t>
+              <a:t>One continuous ladder. ITOLS is the grammar a learner carries up it.</a:t>
             </a:r>
             <a:endParaRPr lang="en-US" dirty="0"/>
           </a:p>
@@ -1040,7 +1040,7 @@
           <a:p>
             <a:r>
               <a:rPr lang="en-US" dirty="0"/>
-              <a:t>The chess analogy is the fastest way in: you do not learn chess by reading about chess. UloX hands you broken systems and a real engine that scores your repair.</a:t>
+              <a:t>Borrowed from chess: you study positions, not essays. The engine scores the repair.</a:t>
             </a:r>
             <a:endParaRPr lang="en-US" dirty="0"/>
           </a:p>
@@ -1128,7 +1128,7 @@
           <a:p>
             <a:r>
               <a:rPr lang="en-US" dirty="0"/>
-              <a:t>ITOLS is the IP. Five layers, three sub-layers each — fifteen checkable things where there used to be a paragraph of hope. Created by Elijah Moses; proprietary to VerionX.</a:t>
+              <a:t>ITOLS is the IP, created by Elijah Moses and proprietary to VerionX. Five layers, three sub-layers each. Fifteen fields a reviewer can check.</a:t>
             </a:r>
             <a:endParaRPr lang="en-US" dirty="0"/>
           </a:p>
@@ -1216,7 +1216,7 @@
           <a:p>
             <a:r>
               <a:rPr lang="en-US" dirty="0"/>
-              <a:t>The learning loop, and the integrity model behind the certificate.</a:t>
+              <a:t>The four steps, and the three things that took real work to build.</a:t>
             </a:r>
             <a:endParaRPr lang="en-US" dirty="0"/>
           </a:p>
@@ -1304,7 +1304,7 @@
           <a:p>
             <a:r>
               <a:rPr lang="en-US" dirty="0"/>
-              <a:t>Ulo traction is real and already counted. UloX platform depth is what is shipped and verifiable today at the URL.</a:t>
+              <a:t>Ulo numbers come from the 2026 deck. UloX numbers are what is live and countable in the product today.</a:t>
             </a:r>
             <a:endParaRPr lang="en-US" dirty="0"/>
           </a:p>
@@ -1785,9 +1785,76 @@
           <a:ln/>
         </p:spPr>
       </p:sp>
-      <p:sp>
-        <p:nvSpPr>
-          <p:cNvPr id="3" name="Shape 1"/>
+      <p:pic>
+        <p:nvPicPr>
+          <p:cNvPr id="3" name="Image 0" descr="C:\Users\HP 830 G7 COREI5\OneDrive\Desktop\Composio\ulox\deck\assets\ikoyi-classroom.jpg">    </p:cNvPr>
+          <p:cNvPicPr>
+            <a:picLocks noChangeAspect="1"/>
+          </p:cNvPicPr>
+          <p:nvPr/>
+        </p:nvPicPr>
+        <p:blipFill>
+          <a:blip r:embed="rId1"/>
+          <a:srcRect l="0" r="0" t="0" b="0"/>
+          <a:stretch/>
+        </p:blipFill>
+        <p:spPr>
+          <a:xfrm>
+            <a:off x="5969000" y="0"/>
+            <a:ext cx="6223000" cy="6858000"/>
+          </a:xfrm>
+          <a:prstGeom prst="rect">
+            <a:avLst/>
+          </a:prstGeom>
+        </p:spPr>
+      </p:pic>
+      <p:sp>
+        <p:nvSpPr>
+          <p:cNvPr id="4" name="Shape 1"/>
+          <p:cNvSpPr/>
+          <p:nvPr/>
+        </p:nvSpPr>
+        <p:spPr>
+          <a:xfrm>
+            <a:off x="5969000" y="0"/>
+            <a:ext cx="2159000" cy="6858000"/>
+          </a:xfrm>
+          <a:prstGeom prst="rect">
+            <a:avLst/>
+          </a:prstGeom>
+          <a:solidFill>
+            <a:srgbClr val="0E0F11">
+              <a:alpha val="92000"/>
+            </a:srgbClr>
+          </a:solidFill>
+          <a:ln/>
+        </p:spPr>
+      </p:sp>
+      <p:sp>
+        <p:nvSpPr>
+          <p:cNvPr id="5" name="Shape 2"/>
+          <p:cNvSpPr/>
+          <p:nvPr/>
+        </p:nvSpPr>
+        <p:spPr>
+          <a:xfrm>
+            <a:off x="8128000" y="0"/>
+            <a:ext cx="4191000" cy="6858000"/>
+          </a:xfrm>
+          <a:prstGeom prst="rect">
+            <a:avLst/>
+          </a:prstGeom>
+          <a:solidFill>
+            <a:srgbClr val="0E0F11">
+              <a:alpha val="28000"/>
+            </a:srgbClr>
+          </a:solidFill>
+          <a:ln/>
+        </p:spPr>
+      </p:sp>
+      <p:sp>
+        <p:nvSpPr>
+          <p:cNvPr id="6" name="Shape 3"/>
           <p:cNvSpPr/>
           <p:nvPr/>
         </p:nvSpPr>
@@ -1807,14 +1874,14 @@
       </p:sp>
       <p:sp>
         <p:nvSpPr>
-          <p:cNvPr id="4" name="Text 2"/>
-          <p:cNvSpPr/>
-          <p:nvPr/>
-        </p:nvSpPr>
-        <p:spPr>
-          <a:xfrm>
-            <a:off x="711200" y="1470660"/>
-            <a:ext cx="6604000" cy="762000"/>
+          <p:cNvPr id="7" name="Text 4"/>
+          <p:cNvSpPr/>
+          <p:nvPr/>
+        </p:nvSpPr>
+        <p:spPr>
+          <a:xfrm>
+            <a:off x="711200" y="1369060"/>
+            <a:ext cx="5842000" cy="762000"/>
           </a:xfrm>
           <a:prstGeom prst="rect">
             <a:avLst/>
@@ -1849,33 +1916,33 @@
       </p:sp>
       <p:sp>
         <p:nvSpPr>
-          <p:cNvPr id="5" name="Text 3"/>
-          <p:cNvSpPr/>
-          <p:nvPr/>
-        </p:nvSpPr>
-        <p:spPr>
-          <a:xfrm>
-            <a:off x="711200" y="1789176"/>
-            <a:ext cx="8128000" cy="2326234"/>
-          </a:xfrm>
-          <a:prstGeom prst="rect">
-            <a:avLst/>
-          </a:prstGeom>
-          <a:noFill/>
-          <a:ln/>
-        </p:spPr>
-        <p:txBody>
-          <a:bodyPr wrap="square" lIns="0" tIns="0" rIns="0" bIns="0" rtlCol="0" anchor="t"/>
-          <a:lstStyle/>
-          <a:p>
-            <a:pPr algn="l" indent="0" marL="0">
-              <a:lnSpc>
-                <a:spcPct val="106000"/>
-              </a:lnSpc>
-              <a:buNone/>
-            </a:pPr>
-            <a:r>
-              <a:rPr lang="en-US" sz="5400" b="1" dirty="0">
+          <p:cNvPr id="8" name="Text 5"/>
+          <p:cNvSpPr/>
+          <p:nvPr/>
+        </p:nvSpPr>
+        <p:spPr>
+          <a:xfrm>
+            <a:off x="711200" y="1773428"/>
+            <a:ext cx="5969000" cy="1623974"/>
+          </a:xfrm>
+          <a:prstGeom prst="rect">
+            <a:avLst/>
+          </a:prstGeom>
+          <a:noFill/>
+          <a:ln/>
+        </p:spPr>
+        <p:txBody>
+          <a:bodyPr wrap="square" lIns="0" tIns="0" rIns="0" bIns="0" rtlCol="0" anchor="t"/>
+          <a:lstStyle/>
+          <a:p>
+            <a:pPr algn="l" indent="0" marL="0">
+              <a:lnSpc>
+                <a:spcPct val="108000"/>
+              </a:lnSpc>
+              <a:buNone/>
+            </a:pPr>
+            <a:r>
+              <a:rPr lang="en-US" sz="3700" b="1" dirty="0">
                 <a:solidFill>
                   <a:srgbClr val="FFFFFF"/>
                 </a:solidFill>
@@ -1885,39 +1952,39 @@
               </a:rPr>
               <a:t>Building the workforce</a:t>
             </a:r>
-            <a:endParaRPr lang="en-US" sz="5400" dirty="0"/>
-          </a:p>
-        </p:txBody>
-      </p:sp>
-      <p:sp>
-        <p:nvSpPr>
-          <p:cNvPr id="6" name="Text 4"/>
-          <p:cNvSpPr/>
-          <p:nvPr/>
-        </p:nvSpPr>
-        <p:spPr>
-          <a:xfrm>
-            <a:off x="711200" y="2500376"/>
-            <a:ext cx="8128000" cy="2326234"/>
-          </a:xfrm>
-          <a:prstGeom prst="rect">
-            <a:avLst/>
-          </a:prstGeom>
-          <a:noFill/>
-          <a:ln/>
-        </p:spPr>
-        <p:txBody>
-          <a:bodyPr wrap="square" lIns="0" tIns="0" rIns="0" bIns="0" rtlCol="0" anchor="t"/>
-          <a:lstStyle/>
-          <a:p>
-            <a:pPr algn="l" indent="0" marL="0">
-              <a:lnSpc>
-                <a:spcPct val="106000"/>
-              </a:lnSpc>
-              <a:buNone/>
-            </a:pPr>
-            <a:r>
-              <a:rPr lang="en-US" sz="5400" b="1" dirty="0">
+            <a:endParaRPr lang="en-US" sz="3700" dirty="0"/>
+          </a:p>
+        </p:txBody>
+      </p:sp>
+      <p:sp>
+        <p:nvSpPr>
+          <p:cNvPr id="9" name="Text 6"/>
+          <p:cNvSpPr/>
+          <p:nvPr/>
+        </p:nvSpPr>
+        <p:spPr>
+          <a:xfrm>
+            <a:off x="711200" y="2306828"/>
+            <a:ext cx="5969000" cy="1623974"/>
+          </a:xfrm>
+          <a:prstGeom prst="rect">
+            <a:avLst/>
+          </a:prstGeom>
+          <a:noFill/>
+          <a:ln/>
+        </p:spPr>
+        <p:txBody>
+          <a:bodyPr wrap="square" lIns="0" tIns="0" rIns="0" bIns="0" rtlCol="0" anchor="t"/>
+          <a:lstStyle/>
+          <a:p>
+            <a:pPr algn="l" indent="0" marL="0">
+              <a:lnSpc>
+                <a:spcPct val="108000"/>
+              </a:lnSpc>
+              <a:buNone/>
+            </a:pPr>
+            <a:r>
+              <a:rPr lang="en-US" sz="3700" b="1" dirty="0">
                 <a:solidFill>
                   <a:srgbClr val="EE1B24"/>
                 </a:solidFill>
@@ -1927,20 +1994,20 @@
               </a:rPr>
               <a:t>for the future.</a:t>
             </a:r>
-            <a:endParaRPr lang="en-US" sz="5400" dirty="0"/>
-          </a:p>
-        </p:txBody>
-      </p:sp>
-      <p:sp>
-        <p:nvSpPr>
-          <p:cNvPr id="7" name="Text 5"/>
-          <p:cNvSpPr/>
-          <p:nvPr/>
-        </p:nvSpPr>
-        <p:spPr>
-          <a:xfrm>
-            <a:off x="711200" y="3756660"/>
-            <a:ext cx="7112000" cy="914400"/>
+            <a:endParaRPr lang="en-US" sz="3700" dirty="0"/>
+          </a:p>
+        </p:txBody>
+      </p:sp>
+      <p:sp>
+        <p:nvSpPr>
+          <p:cNvPr id="10" name="Text 7"/>
+          <p:cNvSpPr/>
+          <p:nvPr/>
+        </p:nvSpPr>
+        <p:spPr>
+          <a:xfrm>
+            <a:off x="711200" y="3330194"/>
+            <a:ext cx="4978400" cy="822960"/>
           </a:xfrm>
           <a:prstGeom prst="rect">
             <a:avLst/>
@@ -1959,7 +2026,7 @@
               <a:buNone/>
             </a:pPr>
             <a:r>
-              <a:rPr lang="en-US" sz="1500" dirty="0">
+              <a:rPr lang="en-US" sz="1350" dirty="0">
                 <a:solidFill>
                   <a:srgbClr val="A5ABB3"/>
                 </a:solidFill>
@@ -1969,20 +2036,20 @@
               </a:rPr>
               <a:t>We exist to equip people with know-how to maximise their potential on earth.</a:t>
             </a:r>
-            <a:endParaRPr lang="en-US" sz="1500" dirty="0"/>
-          </a:p>
-        </p:txBody>
-      </p:sp>
-      <p:sp>
-        <p:nvSpPr>
-          <p:cNvPr id="8" name="Shape 6"/>
-          <p:cNvSpPr/>
-          <p:nvPr/>
-        </p:nvSpPr>
-        <p:spPr>
-          <a:xfrm>
-            <a:off x="711200" y="4521200"/>
-            <a:ext cx="1524000" cy="0"/>
+            <a:endParaRPr lang="en-US" sz="1350" dirty="0"/>
+          </a:p>
+        </p:txBody>
+      </p:sp>
+      <p:sp>
+        <p:nvSpPr>
+          <p:cNvPr id="11" name="Shape 8"/>
+          <p:cNvSpPr/>
+          <p:nvPr/>
+        </p:nvSpPr>
+        <p:spPr>
+          <a:xfrm>
+            <a:off x="711200" y="4064000"/>
+            <a:ext cx="1397000" cy="0"/>
           </a:xfrm>
           <a:prstGeom prst="line">
             <a:avLst/>
@@ -1998,14 +2065,14 @@
       </p:sp>
       <p:sp>
         <p:nvSpPr>
-          <p:cNvPr id="9" name="Text 7"/>
-          <p:cNvSpPr/>
-          <p:nvPr/>
-        </p:nvSpPr>
-        <p:spPr>
-          <a:xfrm>
-            <a:off x="711200" y="4740148"/>
-            <a:ext cx="7112000" cy="863600"/>
+          <p:cNvPr id="12" name="Text 9"/>
+          <p:cNvSpPr/>
+          <p:nvPr/>
+        </p:nvSpPr>
+        <p:spPr>
+          <a:xfrm>
+            <a:off x="711200" y="4286504"/>
+            <a:ext cx="5461000" cy="812800"/>
           </a:xfrm>
           <a:prstGeom prst="rect">
             <a:avLst/>
@@ -2024,7 +2091,7 @@
               <a:buNone/>
             </a:pPr>
             <a:r>
-              <a:rPr lang="en-US" sz="1700" b="1" dirty="0">
+              <a:rPr lang="en-US" sz="1600" b="1" dirty="0">
                 <a:solidFill>
                   <a:srgbClr val="FFFFFF"/>
                 </a:solidFill>
@@ -2034,20 +2101,20 @@
               </a:rPr>
               <a:t>UloX — mastering the utility of AI</a:t>
             </a:r>
-            <a:endParaRPr lang="en-US" sz="1700" dirty="0"/>
-          </a:p>
-        </p:txBody>
-      </p:sp>
-      <p:sp>
-        <p:nvSpPr>
-          <p:cNvPr id="10" name="Text 8"/>
-          <p:cNvSpPr/>
-          <p:nvPr/>
-        </p:nvSpPr>
-        <p:spPr>
-          <a:xfrm>
-            <a:off x="711200" y="5088128"/>
-            <a:ext cx="7112000" cy="609600"/>
+            <a:endParaRPr lang="en-US" sz="1600" dirty="0"/>
+          </a:p>
+        </p:txBody>
+      </p:sp>
+      <p:sp>
+        <p:nvSpPr>
+          <p:cNvPr id="13" name="Text 10"/>
+          <p:cNvSpPr/>
+          <p:nvPr/>
+        </p:nvSpPr>
+        <p:spPr>
+          <a:xfrm>
+            <a:off x="711200" y="4607306"/>
+            <a:ext cx="5461000" cy="584200"/>
           </a:xfrm>
           <a:prstGeom prst="rect">
             <a:avLst/>
@@ -2066,7 +2133,7 @@
               <a:buNone/>
             </a:pPr>
             <a:r>
-              <a:rPr lang="en-US" sz="1200" dirty="0">
+              <a:rPr lang="en-US" sz="1150" dirty="0">
                 <a:solidFill>
                   <a:srgbClr val="A5ABB3"/>
                 </a:solidFill>
@@ -2074,22 +2141,22 @@
                 <a:ea typeface="Arial" pitchFamily="34" charset="-122"/>
                 <a:cs typeface="Arial" pitchFamily="34" charset="-120"/>
               </a:rPr>
-              <a:t>The agentic engineering trainer. Live now.</a:t>
-            </a:r>
-            <a:endParaRPr lang="en-US" sz="1200" dirty="0"/>
-          </a:p>
-        </p:txBody>
-      </p:sp>
-      <p:sp>
-        <p:nvSpPr>
-          <p:cNvPr id="11" name="Text 9"/>
-          <p:cNvSpPr/>
-          <p:nvPr/>
-        </p:nvSpPr>
-        <p:spPr>
-          <a:xfrm>
-            <a:off x="711200" y="5697728"/>
-            <a:ext cx="7112000" cy="609600"/>
+              <a:t>The agentic engineering trainer. Free, and live in the browser.</a:t>
+            </a:r>
+            <a:endParaRPr lang="en-US" sz="1150" dirty="0"/>
+          </a:p>
+        </p:txBody>
+      </p:sp>
+      <p:sp>
+        <p:nvSpPr>
+          <p:cNvPr id="14" name="Text 11"/>
+          <p:cNvSpPr/>
+          <p:nvPr/>
+        </p:nvSpPr>
+        <p:spPr>
+          <a:xfrm>
+            <a:off x="711200" y="5262372"/>
+            <a:ext cx="5461000" cy="660400"/>
           </a:xfrm>
           <a:prstGeom prst="rect">
             <a:avLst/>
@@ -2108,7 +2175,7 @@
               <a:buNone/>
             </a:pPr>
             <a:r>
-              <a:rPr lang="en-US" sz="1200" b="1" dirty="0">
+              <a:rPr lang="en-US" sz="1300" b="1" dirty="0">
                 <a:solidFill>
                   <a:srgbClr val="EE1B24"/>
                 </a:solidFill>
@@ -2118,152 +2185,20 @@
               </a:rPr>
               <a:t>www.ulox.verionx.org</a:t>
             </a:r>
-            <a:endParaRPr lang="en-US" sz="1200" dirty="0"/>
-          </a:p>
-        </p:txBody>
-      </p:sp>
-      <p:sp>
-        <p:nvSpPr>
-          <p:cNvPr id="12" name="Shape 10"/>
-          <p:cNvSpPr/>
-          <p:nvPr/>
-        </p:nvSpPr>
-        <p:spPr>
-          <a:xfrm>
-            <a:off x="9245600" y="1524000"/>
-            <a:ext cx="279400" cy="3810000"/>
-          </a:xfrm>
-          <a:prstGeom prst="roundRect">
-            <a:avLst>
-              <a:gd name="adj" fmla="val 13636"/>
-            </a:avLst>
-          </a:prstGeom>
-          <a:solidFill>
-            <a:srgbClr val="3FD07A"/>
-          </a:solidFill>
-          <a:ln/>
-        </p:spPr>
-      </p:sp>
-      <p:sp>
-        <p:nvSpPr>
-          <p:cNvPr id="13" name="Shape 11"/>
-          <p:cNvSpPr/>
-          <p:nvPr/>
-        </p:nvSpPr>
-        <p:spPr>
-          <a:xfrm>
-            <a:off x="9677400" y="1524000"/>
-            <a:ext cx="279400" cy="3810000"/>
-          </a:xfrm>
-          <a:prstGeom prst="roundRect">
-            <a:avLst>
-              <a:gd name="adj" fmla="val 13636"/>
-            </a:avLst>
-          </a:prstGeom>
-          <a:solidFill>
-            <a:srgbClr val="52C98B"/>
-          </a:solidFill>
-          <a:ln/>
-        </p:spPr>
-      </p:sp>
-      <p:sp>
-        <p:nvSpPr>
-          <p:cNvPr id="14" name="Shape 12"/>
-          <p:cNvSpPr/>
-          <p:nvPr/>
-        </p:nvSpPr>
-        <p:spPr>
-          <a:xfrm>
-            <a:off x="10109200" y="1524000"/>
-            <a:ext cx="279400" cy="3810000"/>
-          </a:xfrm>
-          <a:prstGeom prst="roundRect">
-            <a:avLst>
-              <a:gd name="adj" fmla="val 13636"/>
-            </a:avLst>
-          </a:prstGeom>
-          <a:solidFill>
-            <a:srgbClr val="4EA8FF"/>
-          </a:solidFill>
-          <a:ln/>
-        </p:spPr>
-      </p:sp>
-      <p:sp>
-        <p:nvSpPr>
-          <p:cNvPr id="15" name="Shape 13"/>
-          <p:cNvSpPr/>
-          <p:nvPr/>
-        </p:nvSpPr>
-        <p:spPr>
-          <a:xfrm>
-            <a:off x="10541000" y="1524000"/>
-            <a:ext cx="279400" cy="3810000"/>
-          </a:xfrm>
-          <a:prstGeom prst="roundRect">
-            <a:avLst>
-              <a:gd name="adj" fmla="val 13636"/>
-            </a:avLst>
-          </a:prstGeom>
-          <a:solidFill>
-            <a:srgbClr val="7B8EFF"/>
-          </a:solidFill>
-          <a:ln/>
-        </p:spPr>
-      </p:sp>
-      <p:sp>
-        <p:nvSpPr>
-          <p:cNvPr id="16" name="Shape 14"/>
-          <p:cNvSpPr/>
-          <p:nvPr/>
-        </p:nvSpPr>
-        <p:spPr>
-          <a:xfrm>
-            <a:off x="10972800" y="1524000"/>
-            <a:ext cx="279400" cy="3810000"/>
-          </a:xfrm>
-          <a:prstGeom prst="roundRect">
-            <a:avLst>
-              <a:gd name="adj" fmla="val 13636"/>
-            </a:avLst>
-          </a:prstGeom>
-          <a:solidFill>
-            <a:srgbClr val="9B7BFF"/>
-          </a:solidFill>
-          <a:ln/>
-        </p:spPr>
-      </p:sp>
-      <p:sp>
-        <p:nvSpPr>
-          <p:cNvPr id="17" name="Shape 15"/>
-          <p:cNvSpPr/>
-          <p:nvPr/>
-        </p:nvSpPr>
-        <p:spPr>
-          <a:xfrm>
-            <a:off x="11404600" y="1524000"/>
-            <a:ext cx="279400" cy="3810000"/>
-          </a:xfrm>
-          <a:prstGeom prst="roundRect">
-            <a:avLst>
-              <a:gd name="adj" fmla="val 13636"/>
-            </a:avLst>
-          </a:prstGeom>
-          <a:solidFill>
-            <a:srgbClr val="B57BFF"/>
-          </a:solidFill>
-          <a:ln/>
-        </p:spPr>
-      </p:sp>
-      <p:sp>
-        <p:nvSpPr>
-          <p:cNvPr id="18" name="Text 16"/>
-          <p:cNvSpPr/>
-          <p:nvPr/>
-        </p:nvSpPr>
-        <p:spPr>
-          <a:xfrm>
-            <a:off x="8686800" y="5552440"/>
-            <a:ext cx="2794000" cy="508000"/>
+            <a:endParaRPr lang="en-US" sz="1300" dirty="0"/>
+          </a:p>
+        </p:txBody>
+      </p:sp>
+      <p:sp>
+        <p:nvSpPr>
+          <p:cNvPr id="15" name="Text 12"/>
+          <p:cNvSpPr/>
+          <p:nvPr/>
+        </p:nvSpPr>
+        <p:spPr>
+          <a:xfrm>
+            <a:off x="9271000" y="6395974"/>
+            <a:ext cx="2413000" cy="431800"/>
           </a:xfrm>
           <a:prstGeom prst="rect">
             <a:avLst/>
@@ -2282,59 +2217,17 @@
               <a:buNone/>
             </a:pPr>
             <a:r>
-              <a:rPr lang="en-US" sz="1000" dirty="0">
-                <a:solidFill>
-                  <a:srgbClr val="71777E"/>
-                </a:solidFill>
-                <a:latin typeface="Arial" pitchFamily="34" charset="0"/>
-                <a:ea typeface="Arial" pitchFamily="34" charset="-122"/>
-                <a:cs typeface="Arial" pitchFamily="34" charset="-120"/>
-              </a:rPr>
-              <a:t>Six disciplines. One ladder.</a:t>
-            </a:r>
-            <a:endParaRPr lang="en-US" sz="1000" dirty="0"/>
-          </a:p>
-        </p:txBody>
-      </p:sp>
-      <p:sp>
-        <p:nvSpPr>
-          <p:cNvPr id="19" name="Text 17"/>
-          <p:cNvSpPr/>
-          <p:nvPr/>
-        </p:nvSpPr>
-        <p:spPr>
-          <a:xfrm>
-            <a:off x="8686800" y="5755640"/>
-            <a:ext cx="2794000" cy="508000"/>
-          </a:xfrm>
-          <a:prstGeom prst="rect">
-            <a:avLst/>
-          </a:prstGeom>
-          <a:noFill/>
-          <a:ln/>
-        </p:spPr>
-        <p:txBody>
-          <a:bodyPr wrap="square" lIns="0" tIns="0" rIns="0" bIns="0" rtlCol="0" anchor="t"/>
-          <a:lstStyle/>
-          <a:p>
-            <a:pPr algn="r" indent="0" marL="0">
-              <a:lnSpc>
-                <a:spcPct val="125000"/>
-              </a:lnSpc>
-              <a:buNone/>
-            </a:pPr>
-            <a:r>
-              <a:rPr lang="en-US" sz="1000" dirty="0">
-                <a:solidFill>
-                  <a:srgbClr val="71777E"/>
-                </a:solidFill>
-                <a:latin typeface="Arial" pitchFamily="34" charset="0"/>
-                <a:ea typeface="Arial" pitchFamily="34" charset="-122"/>
-                <a:cs typeface="Arial" pitchFamily="34" charset="-120"/>
-              </a:rPr>
-              <a:t>Prompt → Agentic engineering</a:t>
-            </a:r>
-            <a:endParaRPr lang="en-US" sz="1000" dirty="0"/>
+              <a:rPr lang="en-US" sz="850" dirty="0">
+                <a:solidFill>
+                  <a:srgbClr val="CFD3D8"/>
+                </a:solidFill>
+                <a:latin typeface="Arial" pitchFamily="34" charset="0"/>
+                <a:ea typeface="Arial" pitchFamily="34" charset="-122"/>
+                <a:cs typeface="Arial" pitchFamily="34" charset="-120"/>
+              </a:rPr>
+              <a:t>Government College, Ikoyi</a:t>
+            </a:r>
+            <a:endParaRPr lang="en-US" sz="850" dirty="0"/>
           </a:p>
         </p:txBody>
       </p:sp>
@@ -2676,7 +2569,7 @@
                 <a:ea typeface="Arial" pitchFamily="34" charset="-122"/>
                 <a:cs typeface="Arial" pitchFamily="34" charset="-120"/>
               </a:rPr>
-              <a:t>Open the first learning hub · deepen the gamification engine · ship the agentic curriculum · prove engagement</a:t>
+              <a:t>Open the first learning hub. Deepen the gamification engine. Ship the agentic curriculum. Prove engagement.</a:t>
             </a:r>
             <a:endParaRPr lang="en-US" sz="1000" dirty="0"/>
           </a:p>
@@ -2864,7 +2757,7 @@
                 <a:ea typeface="Arial" pitchFamily="34" charset="-122"/>
                 <a:cs typeface="Arial" pitchFamily="34" charset="-120"/>
               </a:rPr>
-              <a:t>Convert premium · sign institutional licences · enterprise and government reskilling on UloX</a:t>
+              <a:t>Convert premium subscribers. Sign institutional licences. Run enterprise and government reskilling on UloX.</a:t>
             </a:r>
             <a:endParaRPr lang="en-US" sz="1000" dirty="0"/>
           </a:p>
@@ -3052,7 +2945,7 @@
                 <a:ea typeface="Arial" pitchFamily="34" charset="-122"/>
                 <a:cs typeface="Arial" pitchFamily="34" charset="-120"/>
               </a:rPr>
-              <a:t>Expand across Nigeria and West Africa · grow the learning economy · win large institutional contracts</a:t>
+              <a:t>Expand across Nigeria and West Africa. Grow the learning economy. Win large institutional contracts.</a:t>
             </a:r>
             <a:endParaRPr lang="en-US" sz="1000" dirty="0"/>
           </a:p>
@@ -3456,7 +3349,7 @@
                 <a:ea typeface="Arial" pitchFamily="34" charset="-122"/>
                 <a:cs typeface="Arial" pitchFamily="34" charset="-120"/>
               </a:rPr>
-              <a:t>Product, gamification and the UloX agentic curriculum</a:t>
+              <a:t>Product, gamification and the UloX curriculum</a:t>
             </a:r>
             <a:endParaRPr lang="en-US" sz="1050" dirty="0"/>
           </a:p>
@@ -3877,9 +3770,54 @@
           <a:ln/>
         </p:spPr>
       </p:sp>
-      <p:sp>
-        <p:nvSpPr>
-          <p:cNvPr id="3" name="Shape 1"/>
+      <p:pic>
+        <p:nvPicPr>
+          <p:cNvPr id="3" name="Image 0" descr="C:\Users\HP 830 G7 COREI5\OneDrive\Desktop\Composio\ulox\deck\assets\ikoyi-engaged.jpg">    </p:cNvPr>
+          <p:cNvPicPr>
+            <a:picLocks noChangeAspect="1"/>
+          </p:cNvPicPr>
+          <p:nvPr/>
+        </p:nvPicPr>
+        <p:blipFill>
+          <a:blip r:embed="rId1"/>
+          <a:srcRect l="0" r="0" t="0" b="0"/>
+          <a:stretch/>
+        </p:blipFill>
+        <p:spPr>
+          <a:xfrm>
+            <a:off x="0" y="0"/>
+            <a:ext cx="12192000" cy="6858000"/>
+          </a:xfrm>
+          <a:prstGeom prst="rect">
+            <a:avLst/>
+          </a:prstGeom>
+        </p:spPr>
+      </p:pic>
+      <p:sp>
+        <p:nvSpPr>
+          <p:cNvPr id="4" name="Shape 1"/>
+          <p:cNvSpPr/>
+          <p:nvPr/>
+        </p:nvSpPr>
+        <p:spPr>
+          <a:xfrm>
+            <a:off x="0" y="0"/>
+            <a:ext cx="12192000" cy="6858000"/>
+          </a:xfrm>
+          <a:prstGeom prst="rect">
+            <a:avLst/>
+          </a:prstGeom>
+          <a:solidFill>
+            <a:srgbClr val="0E0F11">
+              <a:alpha val="74000"/>
+            </a:srgbClr>
+          </a:solidFill>
+          <a:ln/>
+        </p:spPr>
+      </p:sp>
+      <p:sp>
+        <p:nvSpPr>
+          <p:cNvPr id="5" name="Shape 2"/>
           <p:cNvSpPr/>
           <p:nvPr/>
         </p:nvSpPr>
@@ -3899,7 +3837,7 @@
       </p:sp>
       <p:sp>
         <p:nvSpPr>
-          <p:cNvPr id="4" name="Shape 2"/>
+          <p:cNvPr id="6" name="Shape 3"/>
           <p:cNvSpPr/>
           <p:nvPr/>
         </p:nvSpPr>
@@ -3921,7 +3859,7 @@
       </p:sp>
       <p:sp>
         <p:nvSpPr>
-          <p:cNvPr id="5" name="Shape 3"/>
+          <p:cNvPr id="7" name="Shape 4"/>
           <p:cNvSpPr/>
           <p:nvPr/>
         </p:nvSpPr>
@@ -3943,7 +3881,7 @@
       </p:sp>
       <p:sp>
         <p:nvSpPr>
-          <p:cNvPr id="6" name="Shape 4"/>
+          <p:cNvPr id="8" name="Shape 5"/>
           <p:cNvSpPr/>
           <p:nvPr/>
         </p:nvSpPr>
@@ -3965,7 +3903,7 @@
       </p:sp>
       <p:sp>
         <p:nvSpPr>
-          <p:cNvPr id="7" name="Shape 5"/>
+          <p:cNvPr id="9" name="Shape 6"/>
           <p:cNvSpPr/>
           <p:nvPr/>
         </p:nvSpPr>
@@ -3987,7 +3925,7 @@
       </p:sp>
       <p:sp>
         <p:nvSpPr>
-          <p:cNvPr id="8" name="Shape 6"/>
+          <p:cNvPr id="10" name="Shape 7"/>
           <p:cNvSpPr/>
           <p:nvPr/>
         </p:nvSpPr>
@@ -4009,7 +3947,7 @@
       </p:sp>
       <p:sp>
         <p:nvSpPr>
-          <p:cNvPr id="9" name="Shape 7"/>
+          <p:cNvPr id="11" name="Shape 8"/>
           <p:cNvSpPr/>
           <p:nvPr/>
         </p:nvSpPr>
@@ -4031,14 +3969,14 @@
       </p:sp>
       <p:sp>
         <p:nvSpPr>
-          <p:cNvPr id="10" name="Text 8"/>
-          <p:cNvSpPr/>
-          <p:nvPr/>
-        </p:nvSpPr>
-        <p:spPr>
-          <a:xfrm>
-            <a:off x="711200" y="1534160"/>
-            <a:ext cx="9398000" cy="1820672"/>
+          <p:cNvPr id="12" name="Text 9"/>
+          <p:cNvSpPr/>
+          <p:nvPr/>
+        </p:nvSpPr>
+        <p:spPr>
+          <a:xfrm>
+            <a:off x="711200" y="1541272"/>
+            <a:ext cx="9398000" cy="1729638"/>
           </a:xfrm>
           <a:prstGeom prst="rect">
             <a:avLst/>
@@ -4057,7 +3995,7 @@
               <a:buNone/>
             </a:pPr>
             <a:r>
-              <a:rPr lang="en-US" sz="4000" b="1" dirty="0">
+              <a:rPr lang="en-US" sz="3800" b="1" dirty="0">
                 <a:solidFill>
                   <a:srgbClr val="FFFFFF"/>
                 </a:solidFill>
@@ -4065,22 +4003,22 @@
                 <a:ea typeface="Arial" pitchFamily="34" charset="-122"/>
                 <a:cs typeface="Arial" pitchFamily="34" charset="-120"/>
               </a:rPr>
-              <a:t>The future of work is not</a:t>
-            </a:r>
-            <a:endParaRPr lang="en-US" sz="4000" dirty="0"/>
-          </a:p>
-        </p:txBody>
-      </p:sp>
-      <p:sp>
-        <p:nvSpPr>
-          <p:cNvPr id="11" name="Text 9"/>
-          <p:cNvSpPr/>
-          <p:nvPr/>
-        </p:nvSpPr>
-        <p:spPr>
-          <a:xfrm>
-            <a:off x="711200" y="2143760"/>
-            <a:ext cx="9398000" cy="1820672"/>
+              <a:t>The future of learning is not</a:t>
+            </a:r>
+            <a:endParaRPr lang="en-US" sz="3800" dirty="0"/>
+          </a:p>
+        </p:txBody>
+      </p:sp>
+      <p:sp>
+        <p:nvSpPr>
+          <p:cNvPr id="13" name="Text 10"/>
+          <p:cNvSpPr/>
+          <p:nvPr/>
+        </p:nvSpPr>
+        <p:spPr>
+          <a:xfrm>
+            <a:off x="711200" y="2125472"/>
+            <a:ext cx="9398000" cy="1729638"/>
           </a:xfrm>
           <a:prstGeom prst="rect">
             <a:avLst/>
@@ -4099,7 +4037,7 @@
               <a:buNone/>
             </a:pPr>
             <a:r>
-              <a:rPr lang="en-US" sz="4000" b="1" dirty="0">
+              <a:rPr lang="en-US" sz="3800" b="1" dirty="0">
                 <a:solidFill>
                   <a:srgbClr val="FFFFFF"/>
                 </a:solidFill>
@@ -4109,20 +4047,20 @@
               </a:rPr>
               <a:t>consuming more content.</a:t>
             </a:r>
-            <a:endParaRPr lang="en-US" sz="4000" dirty="0"/>
-          </a:p>
-        </p:txBody>
-      </p:sp>
-      <p:sp>
-        <p:nvSpPr>
-          <p:cNvPr id="12" name="Text 10"/>
-          <p:cNvSpPr/>
-          <p:nvPr/>
-        </p:nvSpPr>
-        <p:spPr>
-          <a:xfrm>
-            <a:off x="711200" y="2804160"/>
-            <a:ext cx="9398000" cy="1820672"/>
+            <a:endParaRPr lang="en-US" sz="3800" dirty="0"/>
+          </a:p>
+        </p:txBody>
+      </p:sp>
+      <p:sp>
+        <p:nvSpPr>
+          <p:cNvPr id="14" name="Text 11"/>
+          <p:cNvSpPr/>
+          <p:nvPr/>
+        </p:nvSpPr>
+        <p:spPr>
+          <a:xfrm>
+            <a:off x="711200" y="2760472"/>
+            <a:ext cx="9398000" cy="1729638"/>
           </a:xfrm>
           <a:prstGeom prst="rect">
             <a:avLst/>
@@ -4141,7 +4079,7 @@
               <a:buNone/>
             </a:pPr>
             <a:r>
-              <a:rPr lang="en-US" sz="4000" b="1" dirty="0">
+              <a:rPr lang="en-US" sz="3800" b="1" dirty="0">
                 <a:solidFill>
                   <a:srgbClr val="EE1B24"/>
                 </a:solidFill>
@@ -4149,22 +4087,22 @@
                 <a:ea typeface="Arial" pitchFamily="34" charset="-122"/>
                 <a:cs typeface="Arial" pitchFamily="34" charset="-120"/>
               </a:rPr>
-              <a:t>It is becoming more capable.</a:t>
-            </a:r>
-            <a:endParaRPr lang="en-US" sz="4000" dirty="0"/>
-          </a:p>
-        </p:txBody>
-      </p:sp>
-      <p:sp>
-        <p:nvSpPr>
-          <p:cNvPr id="13" name="Shape 11"/>
-          <p:cNvSpPr/>
-          <p:nvPr/>
-        </p:nvSpPr>
-        <p:spPr>
-          <a:xfrm>
-            <a:off x="711200" y="3886200"/>
-            <a:ext cx="1524000" cy="0"/>
+              <a:t>It's becoming more capable.</a:t>
+            </a:r>
+            <a:endParaRPr lang="en-US" sz="3800" dirty="0"/>
+          </a:p>
+        </p:txBody>
+      </p:sp>
+      <p:sp>
+        <p:nvSpPr>
+          <p:cNvPr id="15" name="Shape 12"/>
+          <p:cNvSpPr/>
+          <p:nvPr/>
+        </p:nvSpPr>
+        <p:spPr>
+          <a:xfrm>
+            <a:off x="711200" y="3810000"/>
+            <a:ext cx="1397000" cy="0"/>
           </a:xfrm>
           <a:prstGeom prst="line">
             <a:avLst/>
@@ -4180,13 +4118,13 @@
       </p:sp>
       <p:sp>
         <p:nvSpPr>
-          <p:cNvPr id="14" name="Text 12"/>
-          <p:cNvSpPr/>
-          <p:nvPr/>
-        </p:nvSpPr>
-        <p:spPr>
-          <a:xfrm>
-            <a:off x="711200" y="4119372"/>
+          <p:cNvPr id="16" name="Text 13"/>
+          <p:cNvSpPr/>
+          <p:nvPr/>
+        </p:nvSpPr>
+        <p:spPr>
+          <a:xfrm>
+            <a:off x="711200" y="4043172"/>
             <a:ext cx="6604000" cy="792480"/>
           </a:xfrm>
           <a:prstGeom prst="rect">
@@ -4208,7 +4146,7 @@
             <a:r>
               <a:rPr lang="en-US" sz="1300" dirty="0">
                 <a:solidFill>
-                  <a:srgbClr val="A5ABB3"/>
+                  <a:srgbClr val="CFD3D8"/>
                 </a:solidFill>
                 <a:latin typeface="Arial" pitchFamily="34" charset="0"/>
                 <a:ea typeface="Arial" pitchFamily="34" charset="-122"/>
@@ -4222,13 +4160,13 @@
       </p:sp>
       <p:sp>
         <p:nvSpPr>
-          <p:cNvPr id="15" name="Text 13"/>
-          <p:cNvSpPr/>
-          <p:nvPr/>
-        </p:nvSpPr>
-        <p:spPr>
-          <a:xfrm>
-            <a:off x="711200" y="4678172"/>
+          <p:cNvPr id="17" name="Text 14"/>
+          <p:cNvSpPr/>
+          <p:nvPr/>
+        </p:nvSpPr>
+        <p:spPr>
+          <a:xfrm>
+            <a:off x="711200" y="4601972"/>
             <a:ext cx="6604000" cy="660400"/>
           </a:xfrm>
           <a:prstGeom prst="rect">
@@ -4264,13 +4202,13 @@
       </p:sp>
       <p:sp>
         <p:nvSpPr>
-          <p:cNvPr id="16" name="Text 14"/>
-          <p:cNvSpPr/>
-          <p:nvPr/>
-        </p:nvSpPr>
-        <p:spPr>
-          <a:xfrm>
-            <a:off x="711200" y="5401818"/>
+          <p:cNvPr id="18" name="Text 15"/>
+          <p:cNvSpPr/>
+          <p:nvPr/>
+        </p:nvSpPr>
+        <p:spPr>
+          <a:xfrm>
+            <a:off x="711200" y="5351018"/>
             <a:ext cx="6604000" cy="482600"/>
           </a:xfrm>
           <a:prstGeom prst="rect">
@@ -4292,7 +4230,7 @@
             <a:r>
               <a:rPr lang="en-US" sz="950" b="1" spc="130" kern="0" dirty="0">
                 <a:solidFill>
-                  <a:srgbClr val="71777E"/>
+                  <a:srgbClr val="B9BEC4"/>
                 </a:solidFill>
                 <a:latin typeface="Arial" pitchFamily="34" charset="0"/>
                 <a:ea typeface="Arial" pitchFamily="34" charset="-122"/>
@@ -4306,13 +4244,13 @@
       </p:sp>
       <p:sp>
         <p:nvSpPr>
-          <p:cNvPr id="17" name="Text 15"/>
-          <p:cNvSpPr/>
-          <p:nvPr/>
-        </p:nvSpPr>
-        <p:spPr>
-          <a:xfrm>
-            <a:off x="711200" y="5585968"/>
+          <p:cNvPr id="19" name="Text 16"/>
+          <p:cNvSpPr/>
+          <p:nvPr/>
+        </p:nvSpPr>
+        <p:spPr>
+          <a:xfrm>
+            <a:off x="711200" y="5535168"/>
             <a:ext cx="6604000" cy="1117600"/>
           </a:xfrm>
           <a:prstGeom prst="rect">
@@ -4348,13 +4286,13 @@
       </p:sp>
       <p:sp>
         <p:nvSpPr>
-          <p:cNvPr id="18" name="Text 16"/>
-          <p:cNvSpPr/>
-          <p:nvPr/>
-        </p:nvSpPr>
-        <p:spPr>
-          <a:xfrm>
-            <a:off x="7670800" y="5382260"/>
+          <p:cNvPr id="20" name="Text 17"/>
+          <p:cNvSpPr/>
+          <p:nvPr/>
+        </p:nvSpPr>
+        <p:spPr>
+          <a:xfrm>
+            <a:off x="7670800" y="5331460"/>
             <a:ext cx="3810000" cy="762000"/>
           </a:xfrm>
           <a:prstGeom prst="rect">
@@ -4390,13 +4328,13 @@
       </p:sp>
       <p:sp>
         <p:nvSpPr>
-          <p:cNvPr id="19" name="Text 17"/>
-          <p:cNvSpPr/>
-          <p:nvPr/>
-        </p:nvSpPr>
-        <p:spPr>
-          <a:xfrm>
-            <a:off x="7670800" y="5682996"/>
+          <p:cNvPr id="21" name="Text 18"/>
+          <p:cNvSpPr/>
+          <p:nvPr/>
+        </p:nvSpPr>
+        <p:spPr>
+          <a:xfrm>
+            <a:off x="7670800" y="5632196"/>
             <a:ext cx="3810000" cy="457200"/>
           </a:xfrm>
           <a:prstGeom prst="rect">
@@ -4418,7 +4356,7 @@
             <a:r>
               <a:rPr lang="en-US" sz="900" dirty="0">
                 <a:solidFill>
-                  <a:srgbClr val="71777E"/>
+                  <a:srgbClr val="B9BEC4"/>
                 </a:solidFill>
                 <a:latin typeface="Arial" pitchFamily="34" charset="0"/>
                 <a:ea typeface="Arial" pitchFamily="34" charset="-122"/>
@@ -4518,7 +4456,7 @@
                 <a:ea typeface="Arial" pitchFamily="34" charset="-122"/>
                 <a:cs typeface="Arial" pitchFamily="34" charset="-120"/>
               </a:rPr>
-              <a:t>01 — THE SHIFT</a:t>
+              <a:t>01 — WHERE THE GAP MOVED</a:t>
             </a:r>
             <a:endParaRPr lang="en-US" sz="1050" dirty="0"/>
           </a:p>
@@ -4560,7 +4498,7 @@
                 <a:ea typeface="Arial" pitchFamily="34" charset="-122"/>
                 <a:cs typeface="Arial" pitchFamily="34" charset="-120"/>
               </a:rPr>
-              <a:t>Everyone can call a model.</a:t>
+              <a:t>Anyone can call a model.</a:t>
             </a:r>
             <a:endParaRPr lang="en-US" sz="3000" dirty="0"/>
           </a:p>
@@ -4580,7 +4518,7 @@
                 <a:ea typeface="Arial" pitchFamily="34" charset="-122"/>
                 <a:cs typeface="Arial" pitchFamily="34" charset="-120"/>
               </a:rPr>
-              <a:t>Almost nobody can make one reliable.</a:t>
+              <a:t>The failures start after that.</a:t>
             </a:r>
             <a:endParaRPr lang="en-US" sz="3000" dirty="0"/>
           </a:p>
@@ -4595,11 +4533,11 @@
         <p:spPr>
           <a:xfrm>
             <a:off x="711200" y="2489200"/>
-            <a:ext cx="3437467" cy="1625600"/>
+            <a:ext cx="3437467" cy="1676400"/>
           </a:xfrm>
           <a:prstGeom prst="roundRect">
             <a:avLst>
-              <a:gd name="adj" fmla="val 6250"/>
+              <a:gd name="adj" fmla="val 6061"/>
             </a:avLst>
           </a:prstGeom>
           <a:solidFill>
@@ -4617,7 +4555,7 @@
         <p:spPr>
           <a:xfrm>
             <a:off x="711200" y="2489200"/>
-            <a:ext cx="38100" cy="1625600"/>
+            <a:ext cx="38100" cy="1676400"/>
           </a:xfrm>
           <a:prstGeom prst="rect">
             <a:avLst/>
@@ -4637,7 +4575,7 @@
         <p:spPr>
           <a:xfrm>
             <a:off x="711200" y="2489200"/>
-            <a:ext cx="38100" cy="1625600"/>
+            <a:ext cx="38100" cy="1676400"/>
           </a:xfrm>
           <a:prstGeom prst="rect">
             <a:avLst/>
@@ -4684,7 +4622,7 @@
                 <a:ea typeface="Arial" pitchFamily="34" charset="-122"/>
                 <a:cs typeface="Arial" pitchFamily="34" charset="-120"/>
               </a:rPr>
-              <a:t>Access is solved</a:t>
+              <a:t>Calling a model is easy</a:t>
             </a:r>
             <a:endParaRPr lang="en-US" sz="1500" dirty="0"/>
           </a:p>
@@ -4726,7 +4664,7 @@
                 <a:ea typeface="Arial" pitchFamily="34" charset="-122"/>
                 <a:cs typeface="Arial" pitchFamily="34" charset="-120"/>
               </a:rPr>
-              <a:t>A model is three lines of code and a key. The hard part moved somewhere else.</a:t>
+              <a:t>Three lines of code and an API key. Teams hit trouble after the first response, not before it.</a:t>
             </a:r>
             <a:endParaRPr lang="en-US" sz="1100" dirty="0"/>
           </a:p>
@@ -4741,11 +4679,11 @@
         <p:spPr>
           <a:xfrm>
             <a:off x="4377267" y="2489200"/>
-            <a:ext cx="3437467" cy="1625600"/>
+            <a:ext cx="3437467" cy="1676400"/>
           </a:xfrm>
           <a:prstGeom prst="roundRect">
             <a:avLst>
-              <a:gd name="adj" fmla="val 6250"/>
+              <a:gd name="adj" fmla="val 6061"/>
             </a:avLst>
           </a:prstGeom>
           <a:solidFill>
@@ -4763,7 +4701,7 @@
         <p:spPr>
           <a:xfrm>
             <a:off x="4377267" y="2489200"/>
-            <a:ext cx="38100" cy="1625600"/>
+            <a:ext cx="38100" cy="1676400"/>
           </a:xfrm>
           <a:prstGeom prst="rect">
             <a:avLst/>
@@ -4783,7 +4721,7 @@
         <p:spPr>
           <a:xfrm>
             <a:off x="4377267" y="2489200"/>
-            <a:ext cx="38100" cy="1625600"/>
+            <a:ext cx="38100" cy="1676400"/>
           </a:xfrm>
           <a:prstGeom prst="rect">
             <a:avLst/>
@@ -4830,7 +4768,7 @@
                 <a:ea typeface="Arial" pitchFamily="34" charset="-122"/>
                 <a:cs typeface="Arial" pitchFamily="34" charset="-120"/>
               </a:rPr>
-              <a:t>Reliability is not</a:t>
+              <a:t>Agents fail in production</a:t>
             </a:r>
             <a:endParaRPr lang="en-US" sz="1500" dirty="0"/>
           </a:p>
@@ -4872,7 +4810,7 @@
                 <a:ea typeface="Arial" pitchFamily="34" charset="-122"/>
                 <a:cs typeface="Arial" pitchFamily="34" charset="-120"/>
               </a:rPr>
-              <a:t>Agents stall, loop, leak and overspend. Most teams find out in production.</a:t>
+              <a:t>They stall, loop without stopping, leak data through tool output and burn budget. Teams find out when a customer does.</a:t>
             </a:r>
             <a:endParaRPr lang="en-US" sz="1100" dirty="0"/>
           </a:p>
@@ -4887,11 +4825,11 @@
         <p:spPr>
           <a:xfrm>
             <a:off x="8043333" y="2489200"/>
-            <a:ext cx="3437467" cy="1625600"/>
+            <a:ext cx="3437467" cy="1676400"/>
           </a:xfrm>
           <a:prstGeom prst="roundRect">
             <a:avLst>
-              <a:gd name="adj" fmla="val 6250"/>
+              <a:gd name="adj" fmla="val 6061"/>
             </a:avLst>
           </a:prstGeom>
           <a:solidFill>
@@ -4909,7 +4847,7 @@
         <p:spPr>
           <a:xfrm>
             <a:off x="8043333" y="2489200"/>
-            <a:ext cx="38100" cy="1625600"/>
+            <a:ext cx="38100" cy="1676400"/>
           </a:xfrm>
           <a:prstGeom prst="rect">
             <a:avLst/>
@@ -4929,7 +4867,7 @@
         <p:spPr>
           <a:xfrm>
             <a:off x="8043333" y="2489200"/>
-            <a:ext cx="38100" cy="1625600"/>
+            <a:ext cx="38100" cy="1676400"/>
           </a:xfrm>
           <a:prstGeom prst="rect">
             <a:avLst/>
@@ -4976,7 +4914,7 @@
                 <a:ea typeface="Arial" pitchFamily="34" charset="-122"/>
                 <a:cs typeface="Arial" pitchFamily="34" charset="-120"/>
               </a:rPr>
-              <a:t>Nobody is teaching it</a:t>
+              <a:t>Training stops at the prompt</a:t>
             </a:r>
             <a:endParaRPr lang="en-US" sz="1500" dirty="0"/>
           </a:p>
@@ -5018,7 +4956,7 @@
                 <a:ea typeface="Arial" pitchFamily="34" charset="-122"/>
                 <a:cs typeface="Arial" pitchFamily="34" charset="-120"/>
               </a:rPr>
-              <a:t>Courses stop at the prompt. The other five disciplines go untaught.</a:t>
+              <a:t>Courses teach you how to word a request. They skip context, harness, loop, graph and safety.</a:t>
             </a:r>
             <a:endParaRPr lang="en-US" sz="1100" dirty="0"/>
           </a:p>
@@ -5032,12 +4970,12 @@
         </p:nvSpPr>
         <p:spPr>
           <a:xfrm>
-            <a:off x="711200" y="4419600"/>
-            <a:ext cx="10769600" cy="1244600"/>
+            <a:off x="711200" y="4445000"/>
+            <a:ext cx="10769600" cy="1219200"/>
           </a:xfrm>
           <a:prstGeom prst="roundRect">
             <a:avLst>
-              <a:gd name="adj" fmla="val 8163"/>
+              <a:gd name="adj" fmla="val 8333"/>
             </a:avLst>
           </a:prstGeom>
           <a:solidFill>
@@ -5055,7 +4993,7 @@
         <p:spPr>
           <a:xfrm>
             <a:off x="1016000" y="4639818"/>
-            <a:ext cx="3810000" cy="482600"/>
+            <a:ext cx="5080000" cy="482600"/>
           </a:xfrm>
           <a:prstGeom prst="rect">
             <a:avLst/>
@@ -5082,7 +5020,7 @@
                 <a:ea typeface="Arial" pitchFamily="34" charset="-122"/>
                 <a:cs typeface="Arial" pitchFamily="34" charset="-120"/>
               </a:rPr>
-              <a:t>THE COST OF GETTING IT WRONG</a:t>
+              <a:t>WHAT A WORKING AGENT ACTUALLY NEEDS</a:t>
             </a:r>
             <a:endParaRPr lang="en-US" sz="950" dirty="0"/>
           </a:p>
@@ -5096,8 +5034,8 @@
         </p:nvSpPr>
         <p:spPr>
           <a:xfrm>
-            <a:off x="1016000" y="4853432"/>
-            <a:ext cx="3234267" cy="1422400"/>
+            <a:off x="1016000" y="4860544"/>
+            <a:ext cx="3234267" cy="1320800"/>
           </a:xfrm>
           <a:prstGeom prst="rect">
             <a:avLst/>
@@ -5116,7 +5054,7 @@
               <a:buNone/>
             </a:pPr>
             <a:r>
-              <a:rPr lang="en-US" sz="2800" b="1" dirty="0">
+              <a:rPr lang="en-US" sz="2600" b="1" dirty="0">
                 <a:solidFill>
                   <a:srgbClr val="FFFFFF"/>
                 </a:solidFill>
@@ -5126,7 +5064,7 @@
               </a:rPr>
               <a:t>6</a:t>
             </a:r>
-            <a:endParaRPr lang="en-US" sz="2800" dirty="0"/>
+            <a:endParaRPr lang="en-US" sz="2600" dirty="0"/>
           </a:p>
         </p:txBody>
       </p:sp>
@@ -5138,7 +5076,7 @@
         </p:nvSpPr>
         <p:spPr>
           <a:xfrm>
-            <a:off x="1016000" y="5349240"/>
+            <a:off x="1016000" y="5323840"/>
             <a:ext cx="3234267" cy="528320"/>
           </a:xfrm>
           <a:prstGeom prst="rect">
@@ -5166,7 +5104,7 @@
                 <a:ea typeface="Arial" pitchFamily="34" charset="-122"/>
                 <a:cs typeface="Arial" pitchFamily="34" charset="-120"/>
               </a:rPr>
-              <a:t>disciplines behind a reliable agent</a:t>
+              <a:t>disciplines, from prompt through to agentic</a:t>
             </a:r>
             <a:endParaRPr lang="en-US" sz="1000" dirty="0"/>
           </a:p>
@@ -5180,8 +5118,8 @@
         </p:nvSpPr>
         <p:spPr>
           <a:xfrm>
-            <a:off x="4478867" y="4853432"/>
-            <a:ext cx="3234267" cy="1422400"/>
+            <a:off x="4478867" y="4860544"/>
+            <a:ext cx="3234267" cy="1320800"/>
           </a:xfrm>
           <a:prstGeom prst="rect">
             <a:avLst/>
@@ -5200,7 +5138,7 @@
               <a:buNone/>
             </a:pPr>
             <a:r>
-              <a:rPr lang="en-US" sz="2800" b="1" dirty="0">
+              <a:rPr lang="en-US" sz="2600" b="1" dirty="0">
                 <a:solidFill>
                   <a:srgbClr val="EE1B24"/>
                 </a:solidFill>
@@ -5210,7 +5148,7 @@
               </a:rPr>
               <a:t>1</a:t>
             </a:r>
-            <a:endParaRPr lang="en-US" sz="2800" dirty="0"/>
+            <a:endParaRPr lang="en-US" sz="2600" dirty="0"/>
           </a:p>
         </p:txBody>
       </p:sp>
@@ -5222,7 +5160,7 @@
         </p:nvSpPr>
         <p:spPr>
           <a:xfrm>
-            <a:off x="4478867" y="5349240"/>
+            <a:off x="4478867" y="5323840"/>
             <a:ext cx="3234267" cy="528320"/>
           </a:xfrm>
           <a:prstGeom prst="rect">
@@ -5250,7 +5188,7 @@
                 <a:ea typeface="Arial" pitchFamily="34" charset="-122"/>
                 <a:cs typeface="Arial" pitchFamily="34" charset="-120"/>
               </a:rPr>
-              <a:t>of them is what most training covers</a:t>
+              <a:t>of the six that most courses reach</a:t>
             </a:r>
             <a:endParaRPr lang="en-US" sz="1000" dirty="0"/>
           </a:p>
@@ -5264,8 +5202,8 @@
         </p:nvSpPr>
         <p:spPr>
           <a:xfrm>
-            <a:off x="7941733" y="4853432"/>
-            <a:ext cx="3234267" cy="1422400"/>
+            <a:off x="7941733" y="4860544"/>
+            <a:ext cx="3234267" cy="1320800"/>
           </a:xfrm>
           <a:prstGeom prst="rect">
             <a:avLst/>
@@ -5284,7 +5222,7 @@
               <a:buNone/>
             </a:pPr>
             <a:r>
-              <a:rPr lang="en-US" sz="2800" b="1" dirty="0">
+              <a:rPr lang="en-US" sz="2600" b="1" dirty="0">
                 <a:solidFill>
                   <a:srgbClr val="3FD07A"/>
                 </a:solidFill>
@@ -5294,7 +5232,7 @@
               </a:rPr>
               <a:t>18</a:t>
             </a:r>
-            <a:endParaRPr lang="en-US" sz="2800" dirty="0"/>
+            <a:endParaRPr lang="en-US" sz="2600" dirty="0"/>
           </a:p>
         </p:txBody>
       </p:sp>
@@ -5306,7 +5244,7 @@
         </p:nvSpPr>
         <p:spPr>
           <a:xfrm>
-            <a:off x="7941733" y="5349240"/>
+            <a:off x="7941733" y="5323840"/>
             <a:ext cx="3234267" cy="528320"/>
           </a:xfrm>
           <a:prstGeom prst="rect">
@@ -5334,7 +5272,7 @@
                 <a:ea typeface="Arial" pitchFamily="34" charset="-122"/>
                 <a:cs typeface="Arial" pitchFamily="34" charset="-120"/>
               </a:rPr>
-              <a:t>ways an agent breaks, each drilled in UloX</a:t>
+              <a:t>failure modes UloX drills by hand</a:t>
             </a:r>
             <a:endParaRPr lang="en-US" sz="1000" dirty="0"/>
           </a:p>
@@ -5577,7 +5515,7 @@
                 <a:ea typeface="Arial" pitchFamily="34" charset="-122"/>
                 <a:cs typeface="Arial" pitchFamily="34" charset="-120"/>
               </a:rPr>
-              <a:t>One mission. One vision.</a:t>
+              <a:t>Ulo and UloX answer the same</a:t>
             </a:r>
             <a:endParaRPr lang="en-US" sz="3000" dirty="0"/>
           </a:p>
@@ -5597,7 +5535,7 @@
                 <a:ea typeface="Arial" pitchFamily="34" charset="-122"/>
                 <a:cs typeface="Arial" pitchFamily="34" charset="-120"/>
               </a:rPr>
-              <a:t>Two products that serve both.</a:t>
+              <a:t>mission at two different stages.</a:t>
             </a:r>
             <a:endParaRPr lang="en-US" sz="3000" dirty="0"/>
           </a:p>
@@ -5611,12 +5549,12 @@
         </p:nvSpPr>
         <p:spPr>
           <a:xfrm>
-            <a:off x="711200" y="2413000"/>
-            <a:ext cx="5257800" cy="1905000"/>
+            <a:off x="711200" y="2362200"/>
+            <a:ext cx="5334000" cy="1727200"/>
           </a:xfrm>
           <a:prstGeom prst="roundRect">
             <a:avLst>
-              <a:gd name="adj" fmla="val 5333"/>
+              <a:gd name="adj" fmla="val 5882"/>
             </a:avLst>
           </a:prstGeom>
           <a:solidFill>
@@ -5633,8 +5571,8 @@
         </p:nvSpPr>
         <p:spPr>
           <a:xfrm>
-            <a:off x="711200" y="2413000"/>
-            <a:ext cx="38100" cy="1905000"/>
+            <a:off x="711200" y="2362200"/>
+            <a:ext cx="38100" cy="1727200"/>
           </a:xfrm>
           <a:prstGeom prst="rect">
             <a:avLst/>
@@ -5653,8 +5591,8 @@
         </p:nvSpPr>
         <p:spPr>
           <a:xfrm>
-            <a:off x="1016000" y="2633218"/>
-            <a:ext cx="4572000" cy="482600"/>
+            <a:off x="990600" y="2557018"/>
+            <a:ext cx="4826000" cy="482600"/>
           </a:xfrm>
           <a:prstGeom prst="rect">
             <a:avLst/>
@@ -5695,8 +5633,8 @@
         </p:nvSpPr>
         <p:spPr>
           <a:xfrm>
-            <a:off x="1016000" y="2893060"/>
-            <a:ext cx="4648200" cy="822960"/>
+            <a:off x="990600" y="2820416"/>
+            <a:ext cx="4775200" cy="768096"/>
           </a:xfrm>
           <a:prstGeom prst="rect">
             <a:avLst/>
@@ -5715,7 +5653,7 @@
               <a:buNone/>
             </a:pPr>
             <a:r>
-              <a:rPr lang="en-US" sz="1500" b="1" dirty="0">
+              <a:rPr lang="en-US" sz="1400" b="1" dirty="0">
                 <a:solidFill>
                   <a:srgbClr val="FFFFFF"/>
                 </a:solidFill>
@@ -5725,7 +5663,7 @@
               </a:rPr>
               <a:t>We exist to equip people with know-how to maximise their potential on earth.</a:t>
             </a:r>
-            <a:endParaRPr lang="en-US" sz="1500" dirty="0"/>
+            <a:endParaRPr lang="en-US" sz="1400" dirty="0"/>
           </a:p>
         </p:txBody>
       </p:sp>
@@ -5737,12 +5675,12 @@
         </p:nvSpPr>
         <p:spPr>
           <a:xfrm>
-            <a:off x="6223000" y="2413000"/>
-            <a:ext cx="5257800" cy="1905000"/>
+            <a:off x="711200" y="4241800"/>
+            <a:ext cx="5334000" cy="1422400"/>
           </a:xfrm>
           <a:prstGeom prst="roundRect">
             <a:avLst>
-              <a:gd name="adj" fmla="val 5333"/>
+              <a:gd name="adj" fmla="val 7143"/>
             </a:avLst>
           </a:prstGeom>
           <a:solidFill>
@@ -5759,8 +5697,8 @@
         </p:nvSpPr>
         <p:spPr>
           <a:xfrm>
-            <a:off x="6223000" y="2413000"/>
-            <a:ext cx="38100" cy="1905000"/>
+            <a:off x="711200" y="4241800"/>
+            <a:ext cx="38100" cy="1422400"/>
           </a:xfrm>
           <a:prstGeom prst="rect">
             <a:avLst/>
@@ -5779,8 +5717,8 @@
         </p:nvSpPr>
         <p:spPr>
           <a:xfrm>
-            <a:off x="6527800" y="2633218"/>
-            <a:ext cx="4572000" cy="482600"/>
+            <a:off x="990600" y="4436618"/>
+            <a:ext cx="4826000" cy="482600"/>
           </a:xfrm>
           <a:prstGeom prst="rect">
             <a:avLst/>
@@ -5821,8 +5759,8 @@
         </p:nvSpPr>
         <p:spPr>
           <a:xfrm>
-            <a:off x="6527800" y="2893060"/>
-            <a:ext cx="4648200" cy="822960"/>
+            <a:off x="990600" y="4700016"/>
+            <a:ext cx="4775200" cy="768096"/>
           </a:xfrm>
           <a:prstGeom prst="rect">
             <a:avLst/>
@@ -5841,7 +5779,7 @@
               <a:buNone/>
             </a:pPr>
             <a:r>
-              <a:rPr lang="en-US" sz="1500" b="1" dirty="0">
+              <a:rPr lang="en-US" sz="1400" b="1" dirty="0">
                 <a:solidFill>
                   <a:srgbClr val="FFFFFF"/>
                 </a:solidFill>
@@ -5851,20 +5789,65 @@
               </a:rPr>
               <a:t>Building the workforce for the future.</a:t>
             </a:r>
-            <a:endParaRPr lang="en-US" sz="1500" dirty="0"/>
-          </a:p>
-        </p:txBody>
-      </p:sp>
-      <p:sp>
-        <p:nvSpPr>
-          <p:cNvPr id="13" name="Text 11"/>
-          <p:cNvSpPr/>
-          <p:nvPr/>
-        </p:nvSpPr>
-        <p:spPr>
-          <a:xfrm>
-            <a:off x="711200" y="4690618"/>
-            <a:ext cx="10769600" cy="482600"/>
+            <a:endParaRPr lang="en-US" sz="1400" dirty="0"/>
+          </a:p>
+        </p:txBody>
+      </p:sp>
+      <p:pic>
+        <p:nvPicPr>
+          <p:cNvPr id="13" name="Image 0" descr="C:\Users\HP 830 G7 COREI5\OneDrive\Desktop\Composio\ulox\deck\assets\ikeja-student.jpg">    </p:cNvPr>
+          <p:cNvPicPr>
+            <a:picLocks noChangeAspect="1"/>
+          </p:cNvPicPr>
+          <p:nvPr/>
+        </p:nvPicPr>
+        <p:blipFill>
+          <a:blip r:embed="rId1"/>
+          <a:srcRect l="0" r="0" t="0" b="0"/>
+          <a:stretch/>
+        </p:blipFill>
+        <p:spPr>
+          <a:xfrm>
+            <a:off x="6350000" y="2362200"/>
+            <a:ext cx="5130800" cy="1905000"/>
+          </a:xfrm>
+          <a:prstGeom prst="rect">
+            <a:avLst/>
+          </a:prstGeom>
+        </p:spPr>
+      </p:pic>
+      <p:sp>
+        <p:nvSpPr>
+          <p:cNvPr id="14" name="Shape 11"/>
+          <p:cNvSpPr/>
+          <p:nvPr/>
+        </p:nvSpPr>
+        <p:spPr>
+          <a:xfrm>
+            <a:off x="6350000" y="3937000"/>
+            <a:ext cx="5130800" cy="330200"/>
+          </a:xfrm>
+          <a:prstGeom prst="rect">
+            <a:avLst/>
+          </a:prstGeom>
+          <a:solidFill>
+            <a:srgbClr val="0E0F11">
+              <a:alpha val="72000"/>
+            </a:srgbClr>
+          </a:solidFill>
+          <a:ln/>
+        </p:spPr>
+      </p:sp>
+      <p:sp>
+        <p:nvSpPr>
+          <p:cNvPr id="15" name="Text 12"/>
+          <p:cNvSpPr/>
+          <p:nvPr/>
+        </p:nvSpPr>
+        <p:spPr>
+          <a:xfrm>
+            <a:off x="6477000" y="3995674"/>
+            <a:ext cx="4876800" cy="431800"/>
           </a:xfrm>
           <a:prstGeom prst="rect">
             <a:avLst/>
@@ -5883,6 +5866,48 @@
               <a:buNone/>
             </a:pPr>
             <a:r>
+              <a:rPr lang="en-US" sz="850" dirty="0">
+                <a:solidFill>
+                  <a:srgbClr val="CFD3D8"/>
+                </a:solidFill>
+                <a:latin typeface="Arial" pitchFamily="34" charset="0"/>
+                <a:ea typeface="Arial" pitchFamily="34" charset="-122"/>
+                <a:cs typeface="Arial" pitchFamily="34" charset="-120"/>
+              </a:rPr>
+              <a:t>Ikeja High School</a:t>
+            </a:r>
+            <a:endParaRPr lang="en-US" sz="850" dirty="0"/>
+          </a:p>
+        </p:txBody>
+      </p:sp>
+      <p:sp>
+        <p:nvSpPr>
+          <p:cNvPr id="16" name="Text 13"/>
+          <p:cNvSpPr/>
+          <p:nvPr/>
+        </p:nvSpPr>
+        <p:spPr>
+          <a:xfrm>
+            <a:off x="6350000" y="4436618"/>
+            <a:ext cx="5130800" cy="482600"/>
+          </a:xfrm>
+          <a:prstGeom prst="rect">
+            <a:avLst/>
+          </a:prstGeom>
+          <a:noFill/>
+          <a:ln/>
+        </p:spPr>
+        <p:txBody>
+          <a:bodyPr wrap="square" lIns="0" tIns="0" rIns="0" bIns="0" rtlCol="0" anchor="t"/>
+          <a:lstStyle/>
+          <a:p>
+            <a:pPr algn="l" indent="0" marL="0">
+              <a:lnSpc>
+                <a:spcPct val="125000"/>
+              </a:lnSpc>
+              <a:buNone/>
+            </a:pPr>
+            <a:r>
               <a:rPr lang="en-US" sz="950" b="1" spc="130" kern="0" dirty="0">
                 <a:solidFill>
                   <a:srgbClr val="71777E"/>
@@ -5891,7 +5916,7 @@
                 <a:ea typeface="Arial" pitchFamily="34" charset="-122"/>
                 <a:cs typeface="Arial" pitchFamily="34" charset="-120"/>
               </a:rPr>
-              <a:t>HOW THAT BECOMES PRODUCT</a:t>
+              <a:t>WHERE EACH ONE FITS</a:t>
             </a:r>
             <a:endParaRPr lang="en-US" sz="950" dirty="0"/>
           </a:p>
@@ -5899,117 +5924,33 @@
       </p:sp>
       <p:sp>
         <p:nvSpPr>
-          <p:cNvPr id="14" name="Shape 12"/>
-          <p:cNvSpPr/>
-          <p:nvPr/>
-        </p:nvSpPr>
-        <p:spPr>
-          <a:xfrm>
-            <a:off x="711200" y="5003800"/>
-            <a:ext cx="5257800" cy="889000"/>
-          </a:xfrm>
-          <a:prstGeom prst="roundRect">
-            <a:avLst>
-              <a:gd name="adj" fmla="val 11429"/>
-            </a:avLst>
-          </a:prstGeom>
-          <a:solidFill>
-            <a:srgbClr val="17181B"/>
-          </a:solidFill>
-          <a:ln/>
-        </p:spPr>
-      </p:sp>
-      <p:sp>
-        <p:nvSpPr>
-          <p:cNvPr id="15" name="Shape 13"/>
-          <p:cNvSpPr/>
-          <p:nvPr/>
-        </p:nvSpPr>
-        <p:spPr>
-          <a:xfrm>
-            <a:off x="711200" y="5003800"/>
-            <a:ext cx="38100" cy="889000"/>
-          </a:xfrm>
-          <a:prstGeom prst="rect">
-            <a:avLst/>
-          </a:prstGeom>
-          <a:solidFill>
-            <a:srgbClr val="2B2E32"/>
-          </a:solidFill>
-          <a:ln/>
-        </p:spPr>
-      </p:sp>
-      <p:sp>
-        <p:nvSpPr>
-          <p:cNvPr id="16" name="Text 14"/>
-          <p:cNvSpPr/>
-          <p:nvPr/>
-        </p:nvSpPr>
-        <p:spPr>
-          <a:xfrm>
-            <a:off x="965200" y="5160772"/>
-            <a:ext cx="4749800" cy="660400"/>
-          </a:xfrm>
-          <a:prstGeom prst="rect">
-            <a:avLst/>
-          </a:prstGeom>
-          <a:noFill/>
-          <a:ln/>
-        </p:spPr>
-        <p:txBody>
-          <a:bodyPr wrap="square" lIns="0" tIns="0" rIns="0" bIns="0" rtlCol="0" anchor="t"/>
-          <a:lstStyle/>
-          <a:p>
-            <a:pPr algn="l" indent="0" marL="0">
-              <a:lnSpc>
-                <a:spcPct val="125000"/>
-              </a:lnSpc>
-              <a:buNone/>
-            </a:pPr>
-            <a:r>
-              <a:rPr lang="en-US" sz="1300" b="1" dirty="0">
-                <a:solidFill>
-                  <a:srgbClr val="F5A524"/>
-                </a:solidFill>
-                <a:latin typeface="Arial" pitchFamily="34" charset="0"/>
-                <a:ea typeface="Arial" pitchFamily="34" charset="-122"/>
-                <a:cs typeface="Arial" pitchFamily="34" charset="-120"/>
-              </a:rPr>
-              <a:t>Ulo — the foundation</a:t>
-            </a:r>
-            <a:endParaRPr lang="en-US" sz="1300" dirty="0"/>
-          </a:p>
-        </p:txBody>
-      </p:sp>
-      <p:sp>
-        <p:nvSpPr>
-          <p:cNvPr id="17" name="Text 15"/>
-          <p:cNvSpPr/>
-          <p:nvPr/>
-        </p:nvSpPr>
-        <p:spPr>
-          <a:xfrm>
-            <a:off x="965200" y="5449062"/>
-            <a:ext cx="4749800" cy="597408"/>
-          </a:xfrm>
-          <a:prstGeom prst="rect">
-            <a:avLst/>
-          </a:prstGeom>
-          <a:noFill/>
-          <a:ln/>
-        </p:spPr>
-        <p:txBody>
-          <a:bodyPr wrap="square" lIns="0" tIns="0" rIns="0" bIns="0" rtlCol="0" anchor="t"/>
-          <a:lstStyle/>
-          <a:p>
-            <a:pPr algn="l" indent="0" marL="0">
-              <a:lnSpc>
-                <a:spcPct val="140000"/>
-              </a:lnSpc>
-              <a:buNone/>
-            </a:pPr>
-            <a:r>
-              <a:rPr lang="en-US" sz="1050" dirty="0">
+          <p:cNvPr id="17" name="Text 14"/>
+          <p:cNvSpPr/>
+          <p:nvPr/>
+        </p:nvSpPr>
+        <p:spPr>
+          <a:xfrm>
+            <a:off x="6350000" y="4710684"/>
+            <a:ext cx="5130800" cy="648208"/>
+          </a:xfrm>
+          <a:prstGeom prst="rect">
+            <a:avLst/>
+          </a:prstGeom>
+          <a:noFill/>
+          <a:ln/>
+        </p:spPr>
+        <p:txBody>
+          <a:bodyPr wrap="square" lIns="0" tIns="0" rIns="0" bIns="0" rtlCol="0" anchor="t"/>
+          <a:lstStyle/>
+          <a:p>
+            <a:pPr algn="l" indent="0" marL="0">
+              <a:lnSpc>
+                <a:spcPct val="145000"/>
+              </a:lnSpc>
+              <a:buNone/>
+            </a:pPr>
+            <a:r>
+              <a:rPr lang="en-US" sz="1100" dirty="0">
                 <a:solidFill>
                   <a:srgbClr val="A5ABB3"/>
                 </a:solidFill>
@@ -6017,125 +5958,41 @@
                 <a:ea typeface="Arial" pitchFamily="34" charset="-122"/>
                 <a:cs typeface="Arial" pitchFamily="34" charset="-120"/>
               </a:rPr>
-              <a:t>Gamified learning for school-age Nigeria. Learn, play, practise, prove, earn.</a:t>
-            </a:r>
-            <a:endParaRPr lang="en-US" sz="1050" dirty="0"/>
-          </a:p>
-        </p:txBody>
-      </p:sp>
-      <p:sp>
-        <p:nvSpPr>
-          <p:cNvPr id="18" name="Shape 16"/>
-          <p:cNvSpPr/>
-          <p:nvPr/>
-        </p:nvSpPr>
-        <p:spPr>
-          <a:xfrm>
-            <a:off x="6223000" y="5003800"/>
-            <a:ext cx="5257800" cy="889000"/>
-          </a:xfrm>
-          <a:prstGeom prst="roundRect">
-            <a:avLst>
-              <a:gd name="adj" fmla="val 11429"/>
-            </a:avLst>
-          </a:prstGeom>
-          <a:solidFill>
-            <a:srgbClr val="17181B"/>
-          </a:solidFill>
-          <a:ln/>
-        </p:spPr>
-      </p:sp>
-      <p:sp>
-        <p:nvSpPr>
-          <p:cNvPr id="19" name="Shape 17"/>
-          <p:cNvSpPr/>
-          <p:nvPr/>
-        </p:nvSpPr>
-        <p:spPr>
-          <a:xfrm>
-            <a:off x="6223000" y="5003800"/>
-            <a:ext cx="38100" cy="889000"/>
-          </a:xfrm>
-          <a:prstGeom prst="rect">
-            <a:avLst/>
-          </a:prstGeom>
-          <a:solidFill>
-            <a:srgbClr val="2B2E32"/>
-          </a:solidFill>
-          <a:ln/>
-        </p:spPr>
-      </p:sp>
-      <p:sp>
-        <p:nvSpPr>
-          <p:cNvPr id="20" name="Text 18"/>
-          <p:cNvSpPr/>
-          <p:nvPr/>
-        </p:nvSpPr>
-        <p:spPr>
-          <a:xfrm>
-            <a:off x="6477000" y="5160772"/>
-            <a:ext cx="4749800" cy="660400"/>
-          </a:xfrm>
-          <a:prstGeom prst="rect">
-            <a:avLst/>
-          </a:prstGeom>
-          <a:noFill/>
-          <a:ln/>
-        </p:spPr>
-        <p:txBody>
-          <a:bodyPr wrap="square" lIns="0" tIns="0" rIns="0" bIns="0" rtlCol="0" anchor="t"/>
-          <a:lstStyle/>
-          <a:p>
-            <a:pPr algn="l" indent="0" marL="0">
-              <a:lnSpc>
-                <a:spcPct val="125000"/>
-              </a:lnSpc>
-              <a:buNone/>
-            </a:pPr>
-            <a:r>
-              <a:rPr lang="en-US" sz="1300" b="1" dirty="0">
-                <a:solidFill>
-                  <a:srgbClr val="EE1B24"/>
-                </a:solidFill>
-                <a:latin typeface="Arial" pitchFamily="34" charset="0"/>
-                <a:ea typeface="Arial" pitchFamily="34" charset="-122"/>
-                <a:cs typeface="Arial" pitchFamily="34" charset="-120"/>
-              </a:rPr>
-              <a:t>UloX — the frontier</a:t>
-            </a:r>
-            <a:endParaRPr lang="en-US" sz="1300" dirty="0"/>
-          </a:p>
-        </p:txBody>
-      </p:sp>
-      <p:sp>
-        <p:nvSpPr>
-          <p:cNvPr id="21" name="Text 19"/>
-          <p:cNvSpPr/>
-          <p:nvPr/>
-        </p:nvSpPr>
-        <p:spPr>
-          <a:xfrm>
-            <a:off x="6477000" y="5449062"/>
-            <a:ext cx="4749800" cy="597408"/>
-          </a:xfrm>
-          <a:prstGeom prst="rect">
-            <a:avLst/>
-          </a:prstGeom>
-          <a:noFill/>
-          <a:ln/>
-        </p:spPr>
-        <p:txBody>
-          <a:bodyPr wrap="square" lIns="0" tIns="0" rIns="0" bIns="0" rtlCol="0" anchor="t"/>
-          <a:lstStyle/>
-          <a:p>
-            <a:pPr algn="l" indent="0" marL="0">
-              <a:lnSpc>
-                <a:spcPct val="140000"/>
-              </a:lnSpc>
-              <a:buNone/>
-            </a:pPr>
-            <a:r>
-              <a:rPr lang="en-US" sz="1050" dirty="0">
+              <a:t>Ulo: gamified learning for school-age Nigeria. Learn, play, practise, prove, earn.</a:t>
+            </a:r>
+            <a:endParaRPr lang="en-US" sz="1100" dirty="0"/>
+          </a:p>
+        </p:txBody>
+      </p:sp>
+      <p:sp>
+        <p:nvSpPr>
+          <p:cNvPr id="18" name="Text 15"/>
+          <p:cNvSpPr/>
+          <p:nvPr/>
+        </p:nvSpPr>
+        <p:spPr>
+          <a:xfrm>
+            <a:off x="6350000" y="5193284"/>
+            <a:ext cx="5130800" cy="648208"/>
+          </a:xfrm>
+          <a:prstGeom prst="rect">
+            <a:avLst/>
+          </a:prstGeom>
+          <a:noFill/>
+          <a:ln/>
+        </p:spPr>
+        <p:txBody>
+          <a:bodyPr wrap="square" lIns="0" tIns="0" rIns="0" bIns="0" rtlCol="0" anchor="t"/>
+          <a:lstStyle/>
+          <a:p>
+            <a:pPr algn="l" indent="0" marL="0">
+              <a:lnSpc>
+                <a:spcPct val="145000"/>
+              </a:lnSpc>
+              <a:buNone/>
+            </a:pPr>
+            <a:r>
+              <a:rPr lang="en-US" sz="1100" dirty="0">
                 <a:solidFill>
                   <a:srgbClr val="A5ABB3"/>
                 </a:solidFill>
@@ -6143,15 +6000,15 @@
                 <a:ea typeface="Arial" pitchFamily="34" charset="-122"/>
                 <a:cs typeface="Arial" pitchFamily="34" charset="-120"/>
               </a:rPr>
-              <a:t>Agentic engineering for the people who will build and run AI systems.</a:t>
-            </a:r>
-            <a:endParaRPr lang="en-US" sz="1050" dirty="0"/>
-          </a:p>
-        </p:txBody>
-      </p:sp>
-      <p:sp>
-        <p:nvSpPr>
-          <p:cNvPr id="22" name="Shape 20"/>
+              <a:t>UloX: agentic engineering for the people who will build and run the systems.</a:t>
+            </a:r>
+            <a:endParaRPr lang="en-US" sz="1100" dirty="0"/>
+          </a:p>
+        </p:txBody>
+      </p:sp>
+      <p:sp>
+        <p:nvSpPr>
+          <p:cNvPr id="19" name="Shape 16"/>
           <p:cNvSpPr/>
           <p:nvPr/>
         </p:nvSpPr>
@@ -6174,7 +6031,7 @@
       </p:sp>
       <p:sp>
         <p:nvSpPr>
-          <p:cNvPr id="23" name="Text 21"/>
+          <p:cNvPr id="20" name="Text 17"/>
           <p:cNvSpPr/>
           <p:nvPr/>
         </p:nvSpPr>
@@ -6216,7 +6073,7 @@
       </p:sp>
       <p:sp>
         <p:nvSpPr>
-          <p:cNvPr id="24" name="Text 22"/>
+          <p:cNvPr id="21" name="Text 18"/>
           <p:cNvSpPr/>
           <p:nvPr/>
         </p:nvSpPr>
@@ -6344,7 +6201,7 @@
                 <a:ea typeface="Arial" pitchFamily="34" charset="-122"/>
                 <a:cs typeface="Arial" pitchFamily="34" charset="-120"/>
               </a:rPr>
-              <a:t>03 — THE VERIONX SYSTEM</a:t>
+              <a:t>03 — HOW THE TWO CONNECT</a:t>
             </a:r>
             <a:endParaRPr lang="en-US" sz="1050" dirty="0"/>
           </a:p>
@@ -6386,7 +6243,7 @@
                 <a:ea typeface="Arial" pitchFamily="34" charset="-122"/>
                 <a:cs typeface="Arial" pitchFamily="34" charset="-120"/>
               </a:rPr>
-              <a:t>One ladder, from first lesson</a:t>
+              <a:t>One ladder, from a first lesson</a:t>
             </a:r>
             <a:endParaRPr lang="en-US" sz="3000" dirty="0"/>
           </a:p>
@@ -6406,7 +6263,7 @@
                 <a:ea typeface="Arial" pitchFamily="34" charset="-122"/>
                 <a:cs typeface="Arial" pitchFamily="34" charset="-120"/>
               </a:rPr>
-              <a:t>to shipping an AI system.</a:t>
+              <a:t>to a shipped system.</a:t>
             </a:r>
             <a:endParaRPr lang="en-US" sz="3000" dirty="0"/>
           </a:p>
@@ -7478,7 +7335,7 @@
                 <a:ea typeface="Arial" pitchFamily="34" charset="-122"/>
                 <a:cs typeface="Arial" pitchFamily="34" charset="-120"/>
               </a:rPr>
-              <a:t>WHAT HOLDS THE TWO TOGETHER</a:t>
+              <a:t>THE FRAMEWORK UNDERNEATH BOTH</a:t>
             </a:r>
             <a:endParaRPr lang="en-US" sz="950" dirty="0"/>
           </a:p>
@@ -7562,7 +7419,7 @@
                 <a:ea typeface="Arial" pitchFamily="34" charset="-122"/>
                 <a:cs typeface="Arial" pitchFamily="34" charset="-120"/>
               </a:rPr>
-              <a:t>A proprietary VerionX framework for writing an AI instruction you can actually test.</a:t>
+              <a:t>A proprietary VerionX framework for writing an AI instruction you can test.</a:t>
             </a:r>
             <a:endParaRPr lang="en-US" sz="1100" dirty="0"/>
           </a:p>
@@ -7604,7 +7461,7 @@
                 <a:ea typeface="Arial" pitchFamily="34" charset="-122"/>
                 <a:cs typeface="Arial" pitchFamily="34" charset="-120"/>
               </a:rPr>
-              <a:t>Ulo teaches people to learn. UloX teaches people to build. ITOLS is the common grammar underneath both — the thing a learner carries from one to the other.</a:t>
+              <a:t>Ulo teaches a student how to learn. UloX teaches an engineer how to build. Both run on ITOLS, so someone climbing from one to the other keeps the same way of instructing a model.</a:t>
             </a:r>
             <a:endParaRPr lang="en-US" sz="1100" dirty="0"/>
           </a:p>
@@ -7847,7 +7704,7 @@
                 <a:ea typeface="Arial" pitchFamily="34" charset="-122"/>
                 <a:cs typeface="Arial" pitchFamily="34" charset="-120"/>
               </a:rPr>
-              <a:t>You do not learn chess by</a:t>
+              <a:t>UloX hands you a broken agent</a:t>
             </a:r>
             <a:endParaRPr lang="en-US" sz="3000" dirty="0"/>
           </a:p>
@@ -7867,7 +7724,7 @@
                 <a:ea typeface="Arial" pitchFamily="34" charset="-122"/>
                 <a:cs typeface="Arial" pitchFamily="34" charset="-120"/>
               </a:rPr>
-              <a:t>reading about chess.</a:t>
+              <a:t>and asks you to repair it.</a:t>
             </a:r>
             <a:endParaRPr lang="en-US" sz="3000" dirty="0"/>
           </a:p>
@@ -7881,8 +7738,8 @@
         </p:nvSpPr>
         <p:spPr>
           <a:xfrm>
-            <a:off x="711200" y="1985772"/>
-            <a:ext cx="7874000" cy="792480"/>
+            <a:off x="711200" y="1962150"/>
+            <a:ext cx="7874000" cy="762000"/>
           </a:xfrm>
           <a:prstGeom prst="rect">
             <a:avLst/>
@@ -7901,7 +7758,7 @@
               <a:buNone/>
             </a:pPr>
             <a:r>
-              <a:rPr lang="en-US" sz="1300" dirty="0">
+              <a:rPr lang="en-US" sz="1250" dirty="0">
                 <a:solidFill>
                   <a:srgbClr val="A5ABB3"/>
                 </a:solidFill>
@@ -7909,9 +7766,9 @@
                 <a:ea typeface="Arial" pitchFamily="34" charset="-122"/>
                 <a:cs typeface="Arial" pitchFamily="34" charset="-120"/>
               </a:rPr>
-              <a:t>UloX hands you agent systems that are already broken, and asks you to repair them.</a:t>
-            </a:r>
-            <a:endParaRPr lang="en-US" sz="1300" dirty="0"/>
+              <a:t>The method comes from chess training, where players work through positions instead of reading essays about chess.</a:t>
+            </a:r>
+            <a:endParaRPr lang="en-US" sz="1250" dirty="0"/>
           </a:p>
         </p:txBody>
       </p:sp>
@@ -7923,7 +7780,7 @@
         </p:nvSpPr>
         <p:spPr>
           <a:xfrm>
-            <a:off x="711200" y="2616200"/>
+            <a:off x="711200" y="2590800"/>
             <a:ext cx="5257800" cy="1320800"/>
           </a:xfrm>
           <a:prstGeom prst="roundRect">
@@ -7945,7 +7802,7 @@
         </p:nvSpPr>
         <p:spPr>
           <a:xfrm>
-            <a:off x="711200" y="2616200"/>
+            <a:off x="711200" y="2590800"/>
             <a:ext cx="38100" cy="1320800"/>
           </a:xfrm>
           <a:prstGeom prst="rect">
@@ -7965,7 +7822,7 @@
         </p:nvSpPr>
         <p:spPr>
           <a:xfrm>
-            <a:off x="711200" y="2616200"/>
+            <a:off x="711200" y="2590800"/>
             <a:ext cx="38100" cy="1320800"/>
           </a:xfrm>
           <a:prstGeom prst="rect">
@@ -7985,7 +7842,7 @@
         </p:nvSpPr>
         <p:spPr>
           <a:xfrm>
-            <a:off x="965200" y="2795016"/>
+            <a:off x="965200" y="2769616"/>
             <a:ext cx="4749800" cy="711200"/>
           </a:xfrm>
           <a:prstGeom prst="rect">
@@ -8013,7 +7870,7 @@
                 <a:ea typeface="Arial" pitchFamily="34" charset="-122"/>
                 <a:cs typeface="Arial" pitchFamily="34" charset="-120"/>
               </a:rPr>
-              <a:t>Tactics, not quizzes</a:t>
+              <a:t>Every drill starts broken</a:t>
             </a:r>
             <a:endParaRPr lang="en-US" sz="1400" dirty="0"/>
           </a:p>
@@ -8027,7 +7884,7 @@
         </p:nvSpPr>
         <p:spPr>
           <a:xfrm>
-            <a:off x="965200" y="3112262"/>
+            <a:off x="965200" y="3086862"/>
             <a:ext cx="4749800" cy="618744"/>
           </a:xfrm>
           <a:prstGeom prst="rect">
@@ -8055,7 +7912,7 @@
                 <a:ea typeface="Arial" pitchFamily="34" charset="-122"/>
                 <a:cs typeface="Arial" pitchFamily="34" charset="-120"/>
               </a:rPr>
-              <a:t>Each drill is a real agent graph with a real fault: an unbounded loop, a router with two matching branches, a guard that logs and lets it through.</a:t>
+              <a:t>An unbounded loop. A router with two branches that both match. A guard that logs an attack and lets it through anyway.</a:t>
             </a:r>
             <a:endParaRPr lang="en-US" sz="1050" dirty="0"/>
           </a:p>
@@ -8069,7 +7926,7 @@
         </p:nvSpPr>
         <p:spPr>
           <a:xfrm>
-            <a:off x="6223000" y="2616200"/>
+            <a:off x="6223000" y="2590800"/>
             <a:ext cx="5257800" cy="1320800"/>
           </a:xfrm>
           <a:prstGeom prst="roundRect">
@@ -8091,7 +7948,7 @@
         </p:nvSpPr>
         <p:spPr>
           <a:xfrm>
-            <a:off x="6223000" y="2616200"/>
+            <a:off x="6223000" y="2590800"/>
             <a:ext cx="38100" cy="1320800"/>
           </a:xfrm>
           <a:prstGeom prst="rect">
@@ -8111,7 +7968,7 @@
         </p:nvSpPr>
         <p:spPr>
           <a:xfrm>
-            <a:off x="6223000" y="2616200"/>
+            <a:off x="6223000" y="2590800"/>
             <a:ext cx="38100" cy="1320800"/>
           </a:xfrm>
           <a:prstGeom prst="rect">
@@ -8131,7 +7988,7 @@
         </p:nvSpPr>
         <p:spPr>
           <a:xfrm>
-            <a:off x="6477000" y="2795016"/>
+            <a:off x="6477000" y="2769616"/>
             <a:ext cx="4749800" cy="711200"/>
           </a:xfrm>
           <a:prstGeom prst="rect">
@@ -8159,7 +8016,7 @@
                 <a:ea typeface="Arial" pitchFamily="34" charset="-122"/>
                 <a:cs typeface="Arial" pitchFamily="34" charset="-120"/>
               </a:rPr>
-              <a:t>A search engine scores you</a:t>
+              <a:t>A search engine scores your fix</a:t>
             </a:r>
             <a:endParaRPr lang="en-US" sz="1400" dirty="0"/>
           </a:p>
@@ -8173,7 +8030,7 @@
         </p:nvSpPr>
         <p:spPr>
           <a:xfrm>
-            <a:off x="6477000" y="3112262"/>
+            <a:off x="6477000" y="3086862"/>
             <a:ext cx="4749800" cy="618744"/>
           </a:xfrm>
           <a:prstGeom prst="rect">
@@ -8201,7 +8058,7 @@
                 <a:ea typeface="Arial" pitchFamily="34" charset="-122"/>
                 <a:cs typeface="Arial" pitchFamily="34" charset="-120"/>
               </a:rPr>
-              <a:t>A beam search looks for the repair too, so the hint is the first move of a solution it actually found — not a sentence someone pre-wrote.</a:t>
+              <a:t>A beam search solves the position first, so the hint you get is the opening move of a line that actually works.</a:t>
             </a:r>
             <a:endParaRPr lang="en-US" sz="1050" dirty="0"/>
           </a:p>
@@ -8215,7 +8072,7 @@
         </p:nvSpPr>
         <p:spPr>
           <a:xfrm>
-            <a:off x="711200" y="4114800"/>
+            <a:off x="711200" y="4089400"/>
             <a:ext cx="5257800" cy="1320800"/>
           </a:xfrm>
           <a:prstGeom prst="roundRect">
@@ -8237,7 +8094,7 @@
         </p:nvSpPr>
         <p:spPr>
           <a:xfrm>
-            <a:off x="711200" y="4114800"/>
+            <a:off x="711200" y="4089400"/>
             <a:ext cx="38100" cy="1320800"/>
           </a:xfrm>
           <a:prstGeom prst="rect">
@@ -8257,7 +8114,7 @@
         </p:nvSpPr>
         <p:spPr>
           <a:xfrm>
-            <a:off x="711200" y="4114800"/>
+            <a:off x="711200" y="4089400"/>
             <a:ext cx="38100" cy="1320800"/>
           </a:xfrm>
           <a:prstGeom prst="rect">
@@ -8277,7 +8134,7 @@
         </p:nvSpPr>
         <p:spPr>
           <a:xfrm>
-            <a:off x="965200" y="4293616"/>
+            <a:off x="965200" y="4268216"/>
             <a:ext cx="4749800" cy="711200"/>
           </a:xfrm>
           <a:prstGeom prst="rect">
@@ -8305,7 +8162,7 @@
                 <a:ea typeface="Arial" pitchFamily="34" charset="-122"/>
                 <a:cs typeface="Arial" pitchFamily="34" charset="-120"/>
               </a:rPr>
-              <a:t>A simulator decides truth</a:t>
+              <a:t>The simulator runs it</a:t>
             </a:r>
             <a:endParaRPr lang="en-US" sz="1400" dirty="0"/>
           </a:p>
@@ -8319,7 +8176,7 @@
         </p:nvSpPr>
         <p:spPr>
           <a:xfrm>
-            <a:off x="965200" y="4610862"/>
+            <a:off x="965200" y="4585462"/>
             <a:ext cx="4749800" cy="618744"/>
           </a:xfrm>
           <a:prstGeom prst="rect">
@@ -8347,7 +8204,7 @@
                 <a:ea typeface="Arial" pitchFamily="34" charset="-122"/>
                 <a:cs typeface="Arial" pitchFamily="34" charset="-120"/>
               </a:rPr>
-              <a:t>Every fix is executed. "Did it work" is a fact, not an opinion.</a:t>
+              <a:t>Each repair executes against mock tool responses. You watch it hold, or watch it fall over.</a:t>
             </a:r>
             <a:endParaRPr lang="en-US" sz="1050" dirty="0"/>
           </a:p>
@@ -8361,7 +8218,7 @@
         </p:nvSpPr>
         <p:spPr>
           <a:xfrm>
-            <a:off x="6223000" y="4114800"/>
+            <a:off x="6223000" y="4089400"/>
             <a:ext cx="5257800" cy="1320800"/>
           </a:xfrm>
           <a:prstGeom prst="roundRect">
@@ -8383,7 +8240,7 @@
         </p:nvSpPr>
         <p:spPr>
           <a:xfrm>
-            <a:off x="6223000" y="4114800"/>
+            <a:off x="6223000" y="4089400"/>
             <a:ext cx="38100" cy="1320800"/>
           </a:xfrm>
           <a:prstGeom prst="rect">
@@ -8403,7 +8260,7 @@
         </p:nvSpPr>
         <p:spPr>
           <a:xfrm>
-            <a:off x="6223000" y="4114800"/>
+            <a:off x="6223000" y="4089400"/>
             <a:ext cx="38100" cy="1320800"/>
           </a:xfrm>
           <a:prstGeom prst="rect">
@@ -8423,7 +8280,7 @@
         </p:nvSpPr>
         <p:spPr>
           <a:xfrm>
-            <a:off x="6477000" y="4293616"/>
+            <a:off x="6477000" y="4268216"/>
             <a:ext cx="4749800" cy="711200"/>
           </a:xfrm>
           <a:prstGeom prst="rect">
@@ -8451,7 +8308,7 @@
                 <a:ea typeface="Arial" pitchFamily="34" charset="-122"/>
                 <a:cs typeface="Arial" pitchFamily="34" charset="-120"/>
               </a:rPr>
-              <a:t>Rated, like chess</a:t>
+              <a:t>Rated on what you solved</a:t>
             </a:r>
             <a:endParaRPr lang="en-US" sz="1400" dirty="0"/>
           </a:p>
@@ -8465,7 +8322,7 @@
         </p:nvSpPr>
         <p:spPr>
           <a:xfrm>
-            <a:off x="6477000" y="4610862"/>
+            <a:off x="6477000" y="4585462"/>
             <a:ext cx="4749800" cy="618744"/>
           </a:xfrm>
           <a:prstGeom prst="rect">
@@ -8493,7 +8350,7 @@
                 <a:ea typeface="Arial" pitchFamily="34" charset="-122"/>
                 <a:cs typeface="Arial" pitchFamily="34" charset="-120"/>
               </a:rPr>
-              <a:t>Glicko-2 ratings move on what you actually solved, in single player and in rated matches against other engineers.</a:t>
+              <a:t>Glicko-2 ratings move with your results, in single player and in rated matches against other engineers.</a:t>
             </a:r>
             <a:endParaRPr lang="en-US" sz="1050" dirty="0"/>
           </a:p>
@@ -8918,7 +8775,7 @@
         </p:nvSpPr>
         <p:spPr>
           <a:xfrm>
-            <a:off x="939800" y="1892300"/>
+            <a:off x="939800" y="1879600"/>
             <a:ext cx="406400" cy="406400"/>
           </a:xfrm>
           <a:prstGeom prst="roundRect">
@@ -8940,7 +8797,7 @@
         </p:nvSpPr>
         <p:spPr>
           <a:xfrm>
-            <a:off x="939800" y="1924304"/>
+            <a:off x="939800" y="1911604"/>
             <a:ext cx="406400" cy="812800"/>
           </a:xfrm>
           <a:prstGeom prst="rect">
@@ -8982,7 +8839,7 @@
         </p:nvSpPr>
         <p:spPr>
           <a:xfrm>
-            <a:off x="1498600" y="1851660"/>
+            <a:off x="1498600" y="1838960"/>
             <a:ext cx="1905000" cy="762000"/>
           </a:xfrm>
           <a:prstGeom prst="rect">
@@ -9024,7 +8881,7 @@
         </p:nvSpPr>
         <p:spPr>
           <a:xfrm>
-            <a:off x="1498600" y="2136140"/>
+            <a:off x="1498600" y="2123440"/>
             <a:ext cx="2286000" cy="508000"/>
           </a:xfrm>
           <a:prstGeom prst="rect">
@@ -9066,7 +8923,7 @@
         </p:nvSpPr>
         <p:spPr>
           <a:xfrm>
-            <a:off x="4038600" y="1917700"/>
+            <a:off x="4038600" y="1905000"/>
             <a:ext cx="2243667" cy="355600"/>
           </a:xfrm>
           <a:prstGeom prst="roundRect">
@@ -9088,7 +8945,7 @@
         </p:nvSpPr>
         <p:spPr>
           <a:xfrm>
-            <a:off x="4038600" y="1980184"/>
+            <a:off x="4038600" y="1967484"/>
             <a:ext cx="2243667" cy="558800"/>
           </a:xfrm>
           <a:prstGeom prst="rect">
@@ -9130,7 +8987,7 @@
         </p:nvSpPr>
         <p:spPr>
           <a:xfrm>
-            <a:off x="6434667" y="1917700"/>
+            <a:off x="6434667" y="1905000"/>
             <a:ext cx="2243667" cy="355600"/>
           </a:xfrm>
           <a:prstGeom prst="roundRect">
@@ -9152,7 +9009,7 @@
         </p:nvSpPr>
         <p:spPr>
           <a:xfrm>
-            <a:off x="6434667" y="1980184"/>
+            <a:off x="6434667" y="1967484"/>
             <a:ext cx="2243667" cy="558800"/>
           </a:xfrm>
           <a:prstGeom prst="rect">
@@ -9194,7 +9051,7 @@
         </p:nvSpPr>
         <p:spPr>
           <a:xfrm>
-            <a:off x="8830733" y="1917700"/>
+            <a:off x="8830733" y="1905000"/>
             <a:ext cx="2243667" cy="355600"/>
           </a:xfrm>
           <a:prstGeom prst="roundRect">
@@ -9216,7 +9073,7 @@
         </p:nvSpPr>
         <p:spPr>
           <a:xfrm>
-            <a:off x="8830733" y="1980184"/>
+            <a:off x="8830733" y="1967484"/>
             <a:ext cx="2243667" cy="558800"/>
           </a:xfrm>
           <a:prstGeom prst="rect">
@@ -9300,7 +9157,7 @@
         </p:nvSpPr>
         <p:spPr>
           <a:xfrm>
-            <a:off x="939800" y="2705100"/>
+            <a:off x="939800" y="2692400"/>
             <a:ext cx="406400" cy="406400"/>
           </a:xfrm>
           <a:prstGeom prst="roundRect">
@@ -9322,7 +9179,7 @@
         </p:nvSpPr>
         <p:spPr>
           <a:xfrm>
-            <a:off x="939800" y="2737104"/>
+            <a:off x="939800" y="2724404"/>
             <a:ext cx="406400" cy="812800"/>
           </a:xfrm>
           <a:prstGeom prst="rect">
@@ -9364,7 +9221,7 @@
         </p:nvSpPr>
         <p:spPr>
           <a:xfrm>
-            <a:off x="1498600" y="2664460"/>
+            <a:off x="1498600" y="2651760"/>
             <a:ext cx="1905000" cy="762000"/>
           </a:xfrm>
           <a:prstGeom prst="rect">
@@ -9406,7 +9263,7 @@
         </p:nvSpPr>
         <p:spPr>
           <a:xfrm>
-            <a:off x="1498600" y="2948940"/>
+            <a:off x="1498600" y="2936240"/>
             <a:ext cx="2286000" cy="508000"/>
           </a:xfrm>
           <a:prstGeom prst="rect">
@@ -9448,7 +9305,7 @@
         </p:nvSpPr>
         <p:spPr>
           <a:xfrm>
-            <a:off x="4038600" y="2730500"/>
+            <a:off x="4038600" y="2717800"/>
             <a:ext cx="2243667" cy="355600"/>
           </a:xfrm>
           <a:prstGeom prst="roundRect">
@@ -9470,7 +9327,7 @@
         </p:nvSpPr>
         <p:spPr>
           <a:xfrm>
-            <a:off x="4038600" y="2792984"/>
+            <a:off x="4038600" y="2780284"/>
             <a:ext cx="2243667" cy="558800"/>
           </a:xfrm>
           <a:prstGeom prst="rect">
@@ -9512,7 +9369,7 @@
         </p:nvSpPr>
         <p:spPr>
           <a:xfrm>
-            <a:off x="6434667" y="2730500"/>
+            <a:off x="6434667" y="2717800"/>
             <a:ext cx="2243667" cy="355600"/>
           </a:xfrm>
           <a:prstGeom prst="roundRect">
@@ -9534,7 +9391,7 @@
         </p:nvSpPr>
         <p:spPr>
           <a:xfrm>
-            <a:off x="6434667" y="2792984"/>
+            <a:off x="6434667" y="2780284"/>
             <a:ext cx="2243667" cy="558800"/>
           </a:xfrm>
           <a:prstGeom prst="rect">
@@ -9576,7 +9433,7 @@
         </p:nvSpPr>
         <p:spPr>
           <a:xfrm>
-            <a:off x="8830733" y="2730500"/>
+            <a:off x="8830733" y="2717800"/>
             <a:ext cx="2243667" cy="355600"/>
           </a:xfrm>
           <a:prstGeom prst="roundRect">
@@ -9598,7 +9455,7 @@
         </p:nvSpPr>
         <p:spPr>
           <a:xfrm>
-            <a:off x="8830733" y="2792984"/>
+            <a:off x="8830733" y="2780284"/>
             <a:ext cx="2243667" cy="558800"/>
           </a:xfrm>
           <a:prstGeom prst="rect">
@@ -9682,7 +9539,7 @@
         </p:nvSpPr>
         <p:spPr>
           <a:xfrm>
-            <a:off x="939800" y="3517900"/>
+            <a:off x="939800" y="3505200"/>
             <a:ext cx="406400" cy="406400"/>
           </a:xfrm>
           <a:prstGeom prst="roundRect">
@@ -9704,7 +9561,7 @@
         </p:nvSpPr>
         <p:spPr>
           <a:xfrm>
-            <a:off x="939800" y="3549904"/>
+            <a:off x="939800" y="3537204"/>
             <a:ext cx="406400" cy="812800"/>
           </a:xfrm>
           <a:prstGeom prst="rect">
@@ -9746,7 +9603,7 @@
         </p:nvSpPr>
         <p:spPr>
           <a:xfrm>
-            <a:off x="1498600" y="3477260"/>
+            <a:off x="1498600" y="3464560"/>
             <a:ext cx="1905000" cy="762000"/>
           </a:xfrm>
           <a:prstGeom prst="rect">
@@ -9788,7 +9645,7 @@
         </p:nvSpPr>
         <p:spPr>
           <a:xfrm>
-            <a:off x="1498600" y="3761740"/>
+            <a:off x="1498600" y="3749040"/>
             <a:ext cx="2286000" cy="508000"/>
           </a:xfrm>
           <a:prstGeom prst="rect">
@@ -9830,7 +9687,7 @@
         </p:nvSpPr>
         <p:spPr>
           <a:xfrm>
-            <a:off x="4038600" y="3543300"/>
+            <a:off x="4038600" y="3530600"/>
             <a:ext cx="2243667" cy="355600"/>
           </a:xfrm>
           <a:prstGeom prst="roundRect">
@@ -9852,7 +9709,7 @@
         </p:nvSpPr>
         <p:spPr>
           <a:xfrm>
-            <a:off x="4038600" y="3605784"/>
+            <a:off x="4038600" y="3593084"/>
             <a:ext cx="2243667" cy="558800"/>
           </a:xfrm>
           <a:prstGeom prst="rect">
@@ -9894,7 +9751,7 @@
         </p:nvSpPr>
         <p:spPr>
           <a:xfrm>
-            <a:off x="6434667" y="3543300"/>
+            <a:off x="6434667" y="3530600"/>
             <a:ext cx="2243667" cy="355600"/>
           </a:xfrm>
           <a:prstGeom prst="roundRect">
@@ -9916,7 +9773,7 @@
         </p:nvSpPr>
         <p:spPr>
           <a:xfrm>
-            <a:off x="6434667" y="3605784"/>
+            <a:off x="6434667" y="3593084"/>
             <a:ext cx="2243667" cy="558800"/>
           </a:xfrm>
           <a:prstGeom prst="rect">
@@ -9958,7 +9815,7 @@
         </p:nvSpPr>
         <p:spPr>
           <a:xfrm>
-            <a:off x="8830733" y="3543300"/>
+            <a:off x="8830733" y="3530600"/>
             <a:ext cx="2243667" cy="355600"/>
           </a:xfrm>
           <a:prstGeom prst="roundRect">
@@ -9980,7 +9837,7 @@
         </p:nvSpPr>
         <p:spPr>
           <a:xfrm>
-            <a:off x="8830733" y="3605784"/>
+            <a:off x="8830733" y="3593084"/>
             <a:ext cx="2243667" cy="558800"/>
           </a:xfrm>
           <a:prstGeom prst="rect">
@@ -10064,7 +9921,7 @@
         </p:nvSpPr>
         <p:spPr>
           <a:xfrm>
-            <a:off x="939800" y="4330700"/>
+            <a:off x="939800" y="4318000"/>
             <a:ext cx="406400" cy="406400"/>
           </a:xfrm>
           <a:prstGeom prst="roundRect">
@@ -10086,7 +9943,7 @@
         </p:nvSpPr>
         <p:spPr>
           <a:xfrm>
-            <a:off x="939800" y="4362704"/>
+            <a:off x="939800" y="4350004"/>
             <a:ext cx="406400" cy="812800"/>
           </a:xfrm>
           <a:prstGeom prst="rect">
@@ -10128,7 +9985,7 @@
         </p:nvSpPr>
         <p:spPr>
           <a:xfrm>
-            <a:off x="1498600" y="4290060"/>
+            <a:off x="1498600" y="4277360"/>
             <a:ext cx="1905000" cy="762000"/>
           </a:xfrm>
           <a:prstGeom prst="rect">
@@ -10170,7 +10027,7 @@
         </p:nvSpPr>
         <p:spPr>
           <a:xfrm>
-            <a:off x="1498600" y="4574540"/>
+            <a:off x="1498600" y="4561840"/>
             <a:ext cx="2286000" cy="508000"/>
           </a:xfrm>
           <a:prstGeom prst="rect">
@@ -10212,7 +10069,7 @@
         </p:nvSpPr>
         <p:spPr>
           <a:xfrm>
-            <a:off x="4038600" y="4356100"/>
+            <a:off x="4038600" y="4343400"/>
             <a:ext cx="2243667" cy="355600"/>
           </a:xfrm>
           <a:prstGeom prst="roundRect">
@@ -10234,7 +10091,7 @@
         </p:nvSpPr>
         <p:spPr>
           <a:xfrm>
-            <a:off x="4038600" y="4418584"/>
+            <a:off x="4038600" y="4405884"/>
             <a:ext cx="2243667" cy="558800"/>
           </a:xfrm>
           <a:prstGeom prst="rect">
@@ -10276,7 +10133,7 @@
         </p:nvSpPr>
         <p:spPr>
           <a:xfrm>
-            <a:off x="6434667" y="4356100"/>
+            <a:off x="6434667" y="4343400"/>
             <a:ext cx="2243667" cy="355600"/>
           </a:xfrm>
           <a:prstGeom prst="roundRect">
@@ -10298,7 +10155,7 @@
         </p:nvSpPr>
         <p:spPr>
           <a:xfrm>
-            <a:off x="6434667" y="4418584"/>
+            <a:off x="6434667" y="4405884"/>
             <a:ext cx="2243667" cy="558800"/>
           </a:xfrm>
           <a:prstGeom prst="rect">
@@ -10340,7 +10197,7 @@
         </p:nvSpPr>
         <p:spPr>
           <a:xfrm>
-            <a:off x="8830733" y="4356100"/>
+            <a:off x="8830733" y="4343400"/>
             <a:ext cx="2243667" cy="355600"/>
           </a:xfrm>
           <a:prstGeom prst="roundRect">
@@ -10362,7 +10219,7 @@
         </p:nvSpPr>
         <p:spPr>
           <a:xfrm>
-            <a:off x="8830733" y="4418584"/>
+            <a:off x="8830733" y="4405884"/>
             <a:ext cx="2243667" cy="558800"/>
           </a:xfrm>
           <a:prstGeom prst="rect">
@@ -10446,7 +10303,7 @@
         </p:nvSpPr>
         <p:spPr>
           <a:xfrm>
-            <a:off x="939800" y="5143500"/>
+            <a:off x="939800" y="5130800"/>
             <a:ext cx="406400" cy="406400"/>
           </a:xfrm>
           <a:prstGeom prst="roundRect">
@@ -10468,7 +10325,7 @@
         </p:nvSpPr>
         <p:spPr>
           <a:xfrm>
-            <a:off x="939800" y="5175504"/>
+            <a:off x="939800" y="5162804"/>
             <a:ext cx="406400" cy="812800"/>
           </a:xfrm>
           <a:prstGeom prst="rect">
@@ -10510,7 +10367,7 @@
         </p:nvSpPr>
         <p:spPr>
           <a:xfrm>
-            <a:off x="1498600" y="5102860"/>
+            <a:off x="1498600" y="5090160"/>
             <a:ext cx="1905000" cy="762000"/>
           </a:xfrm>
           <a:prstGeom prst="rect">
@@ -10552,7 +10409,7 @@
         </p:nvSpPr>
         <p:spPr>
           <a:xfrm>
-            <a:off x="1498600" y="5387340"/>
+            <a:off x="1498600" y="5374640"/>
             <a:ext cx="2286000" cy="508000"/>
           </a:xfrm>
           <a:prstGeom prst="rect">
@@ -10594,7 +10451,7 @@
         </p:nvSpPr>
         <p:spPr>
           <a:xfrm>
-            <a:off x="4038600" y="5168900"/>
+            <a:off x="4038600" y="5156200"/>
             <a:ext cx="2243667" cy="355600"/>
           </a:xfrm>
           <a:prstGeom prst="roundRect">
@@ -10616,7 +10473,7 @@
         </p:nvSpPr>
         <p:spPr>
           <a:xfrm>
-            <a:off x="4038600" y="5231384"/>
+            <a:off x="4038600" y="5218684"/>
             <a:ext cx="2243667" cy="558800"/>
           </a:xfrm>
           <a:prstGeom prst="rect">
@@ -10658,7 +10515,7 @@
         </p:nvSpPr>
         <p:spPr>
           <a:xfrm>
-            <a:off x="6434667" y="5168900"/>
+            <a:off x="6434667" y="5156200"/>
             <a:ext cx="2243667" cy="355600"/>
           </a:xfrm>
           <a:prstGeom prst="roundRect">
@@ -10680,7 +10537,7 @@
         </p:nvSpPr>
         <p:spPr>
           <a:xfrm>
-            <a:off x="6434667" y="5231384"/>
+            <a:off x="6434667" y="5218684"/>
             <a:ext cx="2243667" cy="558800"/>
           </a:xfrm>
           <a:prstGeom prst="rect">
@@ -10722,7 +10579,7 @@
         </p:nvSpPr>
         <p:spPr>
           <a:xfrm>
-            <a:off x="8830733" y="5168900"/>
+            <a:off x="8830733" y="5156200"/>
             <a:ext cx="2243667" cy="355600"/>
           </a:xfrm>
           <a:prstGeom prst="roundRect">
@@ -10744,7 +10601,7 @@
         </p:nvSpPr>
         <p:spPr>
           <a:xfrm>
-            <a:off x="8830733" y="5231384"/>
+            <a:off x="8830733" y="5218684"/>
             <a:ext cx="2243667" cy="558800"/>
           </a:xfrm>
           <a:prstGeom prst="rect">
@@ -10814,7 +10671,7 @@
                 <a:ea typeface="Arial" pitchFamily="34" charset="-122"/>
                 <a:cs typeface="Arial" pitchFamily="34" charset="-120"/>
               </a:rPr>
-              <a:t>Fifteen checkable fields where there used to be a paragraph of hope — taught, drilled and scored inside UloX.</a:t>
+              <a:t>Fifteen fields a reviewer can check, in place of a paragraph of prose. UloX teaches, drills and scores all five layers.</a:t>
             </a:r>
             <a:endParaRPr lang="en-US" sz="1050" dirty="0"/>
           </a:p>
@@ -11015,7 +10872,7 @@
                 <a:ea typeface="Arial" pitchFamily="34" charset="-122"/>
                 <a:cs typeface="Arial" pitchFamily="34" charset="-120"/>
               </a:rPr>
-              <a:t>06 — HOW IT TEACHES</a:t>
+              <a:t>06 — THE LOOP</a:t>
             </a:r>
             <a:endParaRPr lang="en-US" sz="1050" dirty="0"/>
           </a:p>
@@ -11057,7 +10914,7 @@
                 <a:ea typeface="Arial" pitchFamily="34" charset="-122"/>
                 <a:cs typeface="Arial" pitchFamily="34" charset="-120"/>
               </a:rPr>
-              <a:t>Read it. Fix it. Build it.</a:t>
+              <a:t>Each discipline runs</a:t>
             </a:r>
             <a:endParaRPr lang="en-US" sz="3000" dirty="0"/>
           </a:p>
@@ -11077,7 +10934,7 @@
                 <a:ea typeface="Arial" pitchFamily="34" charset="-122"/>
                 <a:cs typeface="Arial" pitchFamily="34" charset="-120"/>
               </a:rPr>
-              <a:t>Then prove it.</a:t>
+              <a:t>the same four steps.</a:t>
             </a:r>
             <a:endParaRPr lang="en-US" sz="3000" dirty="0"/>
           </a:p>
@@ -11203,7 +11060,7 @@
                 <a:ea typeface="Arial" pitchFamily="34" charset="-122"/>
                 <a:cs typeface="Arial" pitchFamily="34" charset="-120"/>
               </a:rPr>
-              <a:t>A short idea, in plain words at your level.</a:t>
+              <a:t>A short idea, written at the level you picked.</a:t>
             </a:r>
             <a:endParaRPr lang="en-US" sz="1000" dirty="0"/>
           </a:p>
@@ -11329,7 +11186,7 @@
                 <a:ea typeface="Arial" pitchFamily="34" charset="-122"/>
                 <a:cs typeface="Arial" pitchFamily="34" charset="-120"/>
               </a:rPr>
-              <a:t>A broken system, repaired in a bounded number of moves.</a:t>
+              <a:t>A broken system, repaired inside a move limit.</a:t>
             </a:r>
             <a:endParaRPr lang="en-US" sz="1000" dirty="0"/>
           </a:p>
@@ -11455,7 +11312,7 @@
                 <a:ea typeface="Arial" pitchFamily="34" charset="-122"/>
                 <a:cs typeface="Arial" pitchFamily="34" charset="-120"/>
               </a:rPr>
-              <a:t>The same pattern, built from nothing, graded by the simulator.</a:t>
+              <a:t>The same pattern from nothing, graded by the simulator.</a:t>
             </a:r>
             <a:endParaRPr lang="en-US" sz="1000" dirty="0"/>
           </a:p>
@@ -11581,7 +11438,7 @@
                 <a:ea typeface="Arial" pitchFamily="34" charset="-122"/>
                 <a:cs typeface="Arial" pitchFamily="34" charset="-120"/>
               </a:rPr>
-              <a:t>A certificate with a code anyone can verify.</a:t>
+              <a:t>A certificate carrying a code anyone can check.</a:t>
             </a:r>
             <a:endParaRPr lang="en-US" sz="1000" dirty="0"/>
           </a:p>
@@ -11645,7 +11502,7 @@
                 <a:ea typeface="Arial" pitchFamily="34" charset="-122"/>
                 <a:cs typeface="Arial" pitchFamily="34" charset="-120"/>
               </a:rPr>
-              <a:t>THE PART COMPETITORS CANNOT COPY QUICKLY</a:t>
+              <a:t>THREE THINGS THAT TOOK TIME TO BUILD</a:t>
             </a:r>
             <a:endParaRPr lang="en-US" sz="950" dirty="0"/>
           </a:p>
@@ -11687,7 +11544,7 @@
                 <a:ea typeface="Arial" pitchFamily="34" charset="-122"/>
                 <a:cs typeface="Arial" pitchFamily="34" charset="-120"/>
               </a:rPr>
-              <a:t>Proved content</a:t>
+              <a:t>Drills we verified</a:t>
             </a:r>
             <a:endParaRPr lang="en-US" sz="1250" dirty="0"/>
           </a:p>
@@ -11729,7 +11586,7 @@
                 <a:ea typeface="Arial" pitchFamily="34" charset="-122"/>
                 <a:cs typeface="Arial" pitchFamily="34" charset="-120"/>
               </a:rPr>
-              <a:t>Every drill is machine-checked: solvable inside its move limit, not already solved, and findable by the hint the app actually gives.</a:t>
+              <a:t>A script brute-forces all 18 before release. Each one must be solvable inside its move limit, must not already be solved, and must be reachable by the hint the app gives.</a:t>
             </a:r>
             <a:endParaRPr lang="en-US" sz="1000" dirty="0"/>
           </a:p>
@@ -11771,7 +11628,7 @@
                 <a:ea typeface="Arial" pitchFamily="34" charset="-122"/>
                 <a:cs typeface="Arial" pitchFamily="34" charset="-120"/>
               </a:rPr>
-              <a:t>Earned certificates</a:t>
+              <a:t>Certificates you earn</a:t>
             </a:r>
             <a:endParaRPr lang="en-US" sz="1250" dirty="0"/>
           </a:p>
@@ -11813,7 +11670,7 @@
                 <a:ea typeface="Arial" pitchFamily="34" charset="-122"/>
                 <a:cs typeface="Arial" pitchFamily="34" charset="-120"/>
               </a:rPr>
-              <a:t>Requirements are re-derived on the server before anything is issued. The build step cannot be self-declared.</a:t>
+              <a:t>The server re-derives every requirement before it issues one. A learner cannot tick the build step for themselves.</a:t>
             </a:r>
             <a:endParaRPr lang="en-US" sz="1000" dirty="0"/>
           </a:p>
@@ -11855,7 +11712,7 @@
                 <a:ea typeface="Arial" pitchFamily="34" charset="-122"/>
                 <a:cs typeface="Arial" pitchFamily="34" charset="-120"/>
               </a:rPr>
-              <a:t>A distribution loop</a:t>
+              <a:t>A loop back in</a:t>
             </a:r>
             <a:endParaRPr lang="en-US" sz="1250" dirty="0"/>
           </a:p>
@@ -11897,7 +11754,7 @@
                 <a:ea typeface="Arial" pitchFamily="34" charset="-122"/>
                 <a:cs typeface="Arial" pitchFamily="34" charset="-120"/>
               </a:rPr>
-              <a:t>Finish a build, publish it, and anyone can open the link, replay the run and fork it into their own Lab.</a:t>
+              <a:t>Publish a build and anyone can open the link, replay the run and fork it into their own Lab.</a:t>
             </a:r>
             <a:endParaRPr lang="en-US" sz="1000" dirty="0"/>
           </a:p>
@@ -12146,15 +12003,363 @@
           </a:p>
         </p:txBody>
       </p:sp>
-      <p:sp>
-        <p:nvSpPr>
-          <p:cNvPr id="5" name="Text 3"/>
-          <p:cNvSpPr/>
-          <p:nvPr/>
-        </p:nvSpPr>
-        <p:spPr>
-          <a:xfrm>
-            <a:off x="711200" y="1566418"/>
+      <p:pic>
+        <p:nvPicPr>
+          <p:cNvPr id="5" name="Image 0" descr="C:\Users\HP 830 G7 COREI5\OneDrive\Desktop\Composio\ulox\deck\assets\owerri-assembly.jpg">    </p:cNvPr>
+          <p:cNvPicPr>
+            <a:picLocks noChangeAspect="1"/>
+          </p:cNvPicPr>
+          <p:nvPr/>
+        </p:nvPicPr>
+        <p:blipFill>
+          <a:blip r:embed="rId1"/>
+          <a:srcRect l="0" r="0" t="0" b="0"/>
+          <a:stretch/>
+        </p:blipFill>
+        <p:spPr>
+          <a:xfrm>
+            <a:off x="711200" y="1600200"/>
+            <a:ext cx="2489200" cy="1498600"/>
+          </a:xfrm>
+          <a:prstGeom prst="rect">
+            <a:avLst/>
+          </a:prstGeom>
+        </p:spPr>
+      </p:pic>
+      <p:sp>
+        <p:nvSpPr>
+          <p:cNvPr id="6" name="Shape 3"/>
+          <p:cNvSpPr/>
+          <p:nvPr/>
+        </p:nvSpPr>
+        <p:spPr>
+          <a:xfrm>
+            <a:off x="711200" y="2768600"/>
+            <a:ext cx="2489200" cy="330200"/>
+          </a:xfrm>
+          <a:prstGeom prst="rect">
+            <a:avLst/>
+          </a:prstGeom>
+          <a:solidFill>
+            <a:srgbClr val="0E0F11">
+              <a:alpha val="72000"/>
+            </a:srgbClr>
+          </a:solidFill>
+          <a:ln/>
+        </p:spPr>
+      </p:sp>
+      <p:sp>
+        <p:nvSpPr>
+          <p:cNvPr id="7" name="Text 4"/>
+          <p:cNvSpPr/>
+          <p:nvPr/>
+        </p:nvSpPr>
+        <p:spPr>
+          <a:xfrm>
+            <a:off x="838200" y="2827274"/>
+            <a:ext cx="2235200" cy="431800"/>
+          </a:xfrm>
+          <a:prstGeom prst="rect">
+            <a:avLst/>
+          </a:prstGeom>
+          <a:noFill/>
+          <a:ln/>
+        </p:spPr>
+        <p:txBody>
+          <a:bodyPr wrap="square" lIns="0" tIns="0" rIns="0" bIns="0" rtlCol="0" anchor="t"/>
+          <a:lstStyle/>
+          <a:p>
+            <a:pPr algn="l" indent="0" marL="0">
+              <a:lnSpc>
+                <a:spcPct val="125000"/>
+              </a:lnSpc>
+              <a:buNone/>
+            </a:pPr>
+            <a:r>
+              <a:rPr lang="en-US" sz="850" dirty="0">
+                <a:solidFill>
+                  <a:srgbClr val="CFD3D8"/>
+                </a:solidFill>
+                <a:latin typeface="Arial" pitchFamily="34" charset="0"/>
+                <a:ea typeface="Arial" pitchFamily="34" charset="-122"/>
+                <a:cs typeface="Arial" pitchFamily="34" charset="-120"/>
+              </a:rPr>
+              <a:t>Owerri City High School</a:t>
+            </a:r>
+            <a:endParaRPr lang="en-US" sz="850" dirty="0"/>
+          </a:p>
+        </p:txBody>
+      </p:sp>
+      <p:pic>
+        <p:nvPicPr>
+          <p:cNvPr id="8" name="Image 1" descr="C:\Users\HP 830 G7 COREI5\OneDrive\Desktop\Composio\ulox\deck\assets\calabar-lineup.jpg">    </p:cNvPr>
+          <p:cNvPicPr>
+            <a:picLocks noChangeAspect="1"/>
+          </p:cNvPicPr>
+          <p:nvPr/>
+        </p:nvPicPr>
+        <p:blipFill>
+          <a:blip r:embed="rId2"/>
+          <a:srcRect l="0" r="0" t="0" b="0"/>
+          <a:stretch/>
+        </p:blipFill>
+        <p:spPr>
+          <a:xfrm>
+            <a:off x="3327400" y="1600200"/>
+            <a:ext cx="2489200" cy="1498600"/>
+          </a:xfrm>
+          <a:prstGeom prst="rect">
+            <a:avLst/>
+          </a:prstGeom>
+        </p:spPr>
+      </p:pic>
+      <p:sp>
+        <p:nvSpPr>
+          <p:cNvPr id="9" name="Shape 5"/>
+          <p:cNvSpPr/>
+          <p:nvPr/>
+        </p:nvSpPr>
+        <p:spPr>
+          <a:xfrm>
+            <a:off x="3327400" y="2768600"/>
+            <a:ext cx="2489200" cy="330200"/>
+          </a:xfrm>
+          <a:prstGeom prst="rect">
+            <a:avLst/>
+          </a:prstGeom>
+          <a:solidFill>
+            <a:srgbClr val="0E0F11">
+              <a:alpha val="72000"/>
+            </a:srgbClr>
+          </a:solidFill>
+          <a:ln/>
+        </p:spPr>
+      </p:sp>
+      <p:sp>
+        <p:nvSpPr>
+          <p:cNvPr id="10" name="Text 6"/>
+          <p:cNvSpPr/>
+          <p:nvPr/>
+        </p:nvSpPr>
+        <p:spPr>
+          <a:xfrm>
+            <a:off x="3454400" y="2827274"/>
+            <a:ext cx="2235200" cy="431800"/>
+          </a:xfrm>
+          <a:prstGeom prst="rect">
+            <a:avLst/>
+          </a:prstGeom>
+          <a:noFill/>
+          <a:ln/>
+        </p:spPr>
+        <p:txBody>
+          <a:bodyPr wrap="square" lIns="0" tIns="0" rIns="0" bIns="0" rtlCol="0" anchor="t"/>
+          <a:lstStyle/>
+          <a:p>
+            <a:pPr algn="l" indent="0" marL="0">
+              <a:lnSpc>
+                <a:spcPct val="125000"/>
+              </a:lnSpc>
+              <a:buNone/>
+            </a:pPr>
+            <a:r>
+              <a:rPr lang="en-US" sz="850" dirty="0">
+                <a:solidFill>
+                  <a:srgbClr val="CFD3D8"/>
+                </a:solidFill>
+                <a:latin typeface="Arial" pitchFamily="34" charset="0"/>
+                <a:ea typeface="Arial" pitchFamily="34" charset="-122"/>
+                <a:cs typeface="Arial" pitchFamily="34" charset="-120"/>
+              </a:rPr>
+              <a:t>Holy Child, Calabar</a:t>
+            </a:r>
+            <a:endParaRPr lang="en-US" sz="850" dirty="0"/>
+          </a:p>
+        </p:txBody>
+      </p:sp>
+      <p:pic>
+        <p:nvPicPr>
+          <p:cNvPr id="11" name="Image 2" descr="C:\Users\HP 830 G7 COREI5\OneDrive\Desktop\Composio\ulox\deck\assets\activation-assembly.jpg">    </p:cNvPr>
+          <p:cNvPicPr>
+            <a:picLocks noChangeAspect="1"/>
+          </p:cNvPicPr>
+          <p:nvPr/>
+        </p:nvPicPr>
+        <p:blipFill>
+          <a:blip r:embed="rId3"/>
+          <a:srcRect l="0" r="0" t="0" b="0"/>
+          <a:stretch/>
+        </p:blipFill>
+        <p:spPr>
+          <a:xfrm>
+            <a:off x="5943600" y="1600200"/>
+            <a:ext cx="2489200" cy="1498600"/>
+          </a:xfrm>
+          <a:prstGeom prst="rect">
+            <a:avLst/>
+          </a:prstGeom>
+        </p:spPr>
+      </p:pic>
+      <p:sp>
+        <p:nvSpPr>
+          <p:cNvPr id="12" name="Shape 7"/>
+          <p:cNvSpPr/>
+          <p:nvPr/>
+        </p:nvSpPr>
+        <p:spPr>
+          <a:xfrm>
+            <a:off x="5943600" y="2768600"/>
+            <a:ext cx="2489200" cy="330200"/>
+          </a:xfrm>
+          <a:prstGeom prst="rect">
+            <a:avLst/>
+          </a:prstGeom>
+          <a:solidFill>
+            <a:srgbClr val="0E0F11">
+              <a:alpha val="72000"/>
+            </a:srgbClr>
+          </a:solidFill>
+          <a:ln/>
+        </p:spPr>
+      </p:sp>
+      <p:sp>
+        <p:nvSpPr>
+          <p:cNvPr id="13" name="Text 8"/>
+          <p:cNvSpPr/>
+          <p:nvPr/>
+        </p:nvSpPr>
+        <p:spPr>
+          <a:xfrm>
+            <a:off x="6070600" y="2827274"/>
+            <a:ext cx="2235200" cy="431800"/>
+          </a:xfrm>
+          <a:prstGeom prst="rect">
+            <a:avLst/>
+          </a:prstGeom>
+          <a:noFill/>
+          <a:ln/>
+        </p:spPr>
+        <p:txBody>
+          <a:bodyPr wrap="square" lIns="0" tIns="0" rIns="0" bIns="0" rtlCol="0" anchor="t"/>
+          <a:lstStyle/>
+          <a:p>
+            <a:pPr algn="l" indent="0" marL="0">
+              <a:lnSpc>
+                <a:spcPct val="125000"/>
+              </a:lnSpc>
+              <a:buNone/>
+            </a:pPr>
+            <a:r>
+              <a:rPr lang="en-US" sz="850" dirty="0">
+                <a:solidFill>
+                  <a:srgbClr val="CFD3D8"/>
+                </a:solidFill>
+                <a:latin typeface="Arial" pitchFamily="34" charset="0"/>
+                <a:ea typeface="Arial" pitchFamily="34" charset="-122"/>
+                <a:cs typeface="Arial" pitchFamily="34" charset="-120"/>
+              </a:rPr>
+              <a:t>Secondary school activation</a:t>
+            </a:r>
+            <a:endParaRPr lang="en-US" sz="850" dirty="0"/>
+          </a:p>
+        </p:txBody>
+      </p:sp>
+      <p:pic>
+        <p:nvPicPr>
+          <p:cNvPr id="14" name="Image 3" descr="C:\Users\HP 830 G7 COREI5\OneDrive\Desktop\Composio\ulox\deck\assets\community-outreach.jpg">    </p:cNvPr>
+          <p:cNvPicPr>
+            <a:picLocks noChangeAspect="1"/>
+          </p:cNvPicPr>
+          <p:nvPr/>
+        </p:nvPicPr>
+        <p:blipFill>
+          <a:blip r:embed="rId4"/>
+          <a:srcRect l="0" r="0" t="0" b="0"/>
+          <a:stretch/>
+        </p:blipFill>
+        <p:spPr>
+          <a:xfrm>
+            <a:off x="8559800" y="1600200"/>
+            <a:ext cx="2921000" cy="1498600"/>
+          </a:xfrm>
+          <a:prstGeom prst="rect">
+            <a:avLst/>
+          </a:prstGeom>
+        </p:spPr>
+      </p:pic>
+      <p:sp>
+        <p:nvSpPr>
+          <p:cNvPr id="15" name="Shape 9"/>
+          <p:cNvSpPr/>
+          <p:nvPr/>
+        </p:nvSpPr>
+        <p:spPr>
+          <a:xfrm>
+            <a:off x="8559800" y="2768600"/>
+            <a:ext cx="2921000" cy="330200"/>
+          </a:xfrm>
+          <a:prstGeom prst="rect">
+            <a:avLst/>
+          </a:prstGeom>
+          <a:solidFill>
+            <a:srgbClr val="0E0F11">
+              <a:alpha val="72000"/>
+            </a:srgbClr>
+          </a:solidFill>
+          <a:ln/>
+        </p:spPr>
+      </p:sp>
+      <p:sp>
+        <p:nvSpPr>
+          <p:cNvPr id="16" name="Text 10"/>
+          <p:cNvSpPr/>
+          <p:nvPr/>
+        </p:nvSpPr>
+        <p:spPr>
+          <a:xfrm>
+            <a:off x="8686800" y="2827274"/>
+            <a:ext cx="2667000" cy="431800"/>
+          </a:xfrm>
+          <a:prstGeom prst="rect">
+            <a:avLst/>
+          </a:prstGeom>
+          <a:noFill/>
+          <a:ln/>
+        </p:spPr>
+        <p:txBody>
+          <a:bodyPr wrap="square" lIns="0" tIns="0" rIns="0" bIns="0" rtlCol="0" anchor="t"/>
+          <a:lstStyle/>
+          <a:p>
+            <a:pPr algn="l" indent="0" marL="0">
+              <a:lnSpc>
+                <a:spcPct val="125000"/>
+              </a:lnSpc>
+              <a:buNone/>
+            </a:pPr>
+            <a:r>
+              <a:rPr lang="en-US" sz="850" dirty="0">
+                <a:solidFill>
+                  <a:srgbClr val="CFD3D8"/>
+                </a:solidFill>
+                <a:latin typeface="Arial" pitchFamily="34" charset="0"/>
+                <a:ea typeface="Arial" pitchFamily="34" charset="-122"/>
+                <a:cs typeface="Arial" pitchFamily="34" charset="-120"/>
+              </a:rPr>
+              <a:t>Community drive, Lagos</a:t>
+            </a:r>
+            <a:endParaRPr lang="en-US" sz="850" dirty="0"/>
+          </a:p>
+        </p:txBody>
+      </p:sp>
+      <p:sp>
+        <p:nvSpPr>
+          <p:cNvPr id="17" name="Text 11"/>
+          <p:cNvSpPr/>
+          <p:nvPr/>
+        </p:nvSpPr>
+        <p:spPr>
+          <a:xfrm>
+            <a:off x="711200" y="3293618"/>
             <a:ext cx="7112000" cy="482600"/>
           </a:xfrm>
           <a:prstGeom prst="rect">
@@ -12182,7 +12387,7 @@
                 <a:ea typeface="Arial" pitchFamily="34" charset="-122"/>
                 <a:cs typeface="Arial" pitchFamily="34" charset="-120"/>
               </a:rPr>
-              <a:t>ULO — REACH ALREADY BUILT</a:t>
+              <a:t>ULO — WHAT THE OUTREACH HAS REACHED</a:t>
             </a:r>
             <a:endParaRPr lang="en-US" sz="950" dirty="0"/>
           </a:p>
@@ -12190,14 +12395,14 @@
       </p:sp>
       <p:sp>
         <p:nvSpPr>
-          <p:cNvPr id="6" name="Text 4"/>
-          <p:cNvSpPr/>
-          <p:nvPr/>
-        </p:nvSpPr>
-        <p:spPr>
-          <a:xfrm>
-            <a:off x="711200" y="1812544"/>
-            <a:ext cx="2011680" cy="1320800"/>
+          <p:cNvPr id="18" name="Text 12"/>
+          <p:cNvSpPr/>
+          <p:nvPr/>
+        </p:nvSpPr>
+        <p:spPr>
+          <a:xfrm>
+            <a:off x="711200" y="3521456"/>
+            <a:ext cx="2011680" cy="1219200"/>
           </a:xfrm>
           <a:prstGeom prst="rect">
             <a:avLst/>
@@ -12216,7 +12421,7 @@
               <a:buNone/>
             </a:pPr>
             <a:r>
-              <a:rPr lang="en-US" sz="2600" b="1" dirty="0">
+              <a:rPr lang="en-US" sz="2400" b="1" dirty="0">
                 <a:solidFill>
                   <a:srgbClr val="F5A524"/>
                 </a:solidFill>
@@ -12226,19 +12431,19 @@
               </a:rPr>
               <a:t>80,000</a:t>
             </a:r>
-            <a:endParaRPr lang="en-US" sz="2600" dirty="0"/>
-          </a:p>
-        </p:txBody>
-      </p:sp>
-      <p:sp>
-        <p:nvSpPr>
-          <p:cNvPr id="7" name="Text 5"/>
-          <p:cNvSpPr/>
-          <p:nvPr/>
-        </p:nvSpPr>
-        <p:spPr>
-          <a:xfrm>
-            <a:off x="711200" y="2275840"/>
+            <a:endParaRPr lang="en-US" sz="2400" dirty="0"/>
+          </a:p>
+        </p:txBody>
+      </p:sp>
+      <p:sp>
+        <p:nvSpPr>
+          <p:cNvPr id="19" name="Text 13"/>
+          <p:cNvSpPr/>
+          <p:nvPr/>
+        </p:nvSpPr>
+        <p:spPr>
+          <a:xfrm>
+            <a:off x="711200" y="3952240"/>
             <a:ext cx="2011680" cy="528320"/>
           </a:xfrm>
           <a:prstGeom prst="rect">
@@ -12274,14 +12479,14 @@
       </p:sp>
       <p:sp>
         <p:nvSpPr>
-          <p:cNvPr id="8" name="Text 6"/>
-          <p:cNvSpPr/>
-          <p:nvPr/>
-        </p:nvSpPr>
-        <p:spPr>
-          <a:xfrm>
-            <a:off x="2900680" y="1812544"/>
-            <a:ext cx="2011680" cy="1320800"/>
+          <p:cNvPr id="20" name="Text 14"/>
+          <p:cNvSpPr/>
+          <p:nvPr/>
+        </p:nvSpPr>
+        <p:spPr>
+          <a:xfrm>
+            <a:off x="2900680" y="3521456"/>
+            <a:ext cx="2011680" cy="1219200"/>
           </a:xfrm>
           <a:prstGeom prst="rect">
             <a:avLst/>
@@ -12300,7 +12505,7 @@
               <a:buNone/>
             </a:pPr>
             <a:r>
-              <a:rPr lang="en-US" sz="2600" b="1" dirty="0">
+              <a:rPr lang="en-US" sz="2400" b="1" dirty="0">
                 <a:solidFill>
                   <a:srgbClr val="F5A524"/>
                 </a:solidFill>
@@ -12310,19 +12515,19 @@
               </a:rPr>
               <a:t>40</a:t>
             </a:r>
-            <a:endParaRPr lang="en-US" sz="2600" dirty="0"/>
-          </a:p>
-        </p:txBody>
-      </p:sp>
-      <p:sp>
-        <p:nvSpPr>
-          <p:cNvPr id="9" name="Text 7"/>
-          <p:cNvSpPr/>
-          <p:nvPr/>
-        </p:nvSpPr>
-        <p:spPr>
-          <a:xfrm>
-            <a:off x="2900680" y="2275840"/>
+            <a:endParaRPr lang="en-US" sz="2400" dirty="0"/>
+          </a:p>
+        </p:txBody>
+      </p:sp>
+      <p:sp>
+        <p:nvSpPr>
+          <p:cNvPr id="21" name="Text 15"/>
+          <p:cNvSpPr/>
+          <p:nvPr/>
+        </p:nvSpPr>
+        <p:spPr>
+          <a:xfrm>
+            <a:off x="2900680" y="3952240"/>
             <a:ext cx="2011680" cy="528320"/>
           </a:xfrm>
           <a:prstGeom prst="rect">
@@ -12358,14 +12563,14 @@
       </p:sp>
       <p:sp>
         <p:nvSpPr>
-          <p:cNvPr id="10" name="Text 8"/>
-          <p:cNvSpPr/>
-          <p:nvPr/>
-        </p:nvSpPr>
-        <p:spPr>
-          <a:xfrm>
-            <a:off x="5090160" y="1812544"/>
-            <a:ext cx="2011680" cy="1320800"/>
+          <p:cNvPr id="22" name="Text 16"/>
+          <p:cNvSpPr/>
+          <p:nvPr/>
+        </p:nvSpPr>
+        <p:spPr>
+          <a:xfrm>
+            <a:off x="5090160" y="3521456"/>
+            <a:ext cx="2011680" cy="1219200"/>
           </a:xfrm>
           <a:prstGeom prst="rect">
             <a:avLst/>
@@ -12384,7 +12589,7 @@
               <a:buNone/>
             </a:pPr>
             <a:r>
-              <a:rPr lang="en-US" sz="2600" b="1" dirty="0">
+              <a:rPr lang="en-US" sz="2400" b="1" dirty="0">
                 <a:solidFill>
                   <a:srgbClr val="F5A524"/>
                 </a:solidFill>
@@ -12394,19 +12599,19 @@
               </a:rPr>
               <a:t>7</a:t>
             </a:r>
-            <a:endParaRPr lang="en-US" sz="2600" dirty="0"/>
-          </a:p>
-        </p:txBody>
-      </p:sp>
-      <p:sp>
-        <p:nvSpPr>
-          <p:cNvPr id="11" name="Text 9"/>
-          <p:cNvSpPr/>
-          <p:nvPr/>
-        </p:nvSpPr>
-        <p:spPr>
-          <a:xfrm>
-            <a:off x="5090160" y="2275840"/>
+            <a:endParaRPr lang="en-US" sz="2400" dirty="0"/>
+          </a:p>
+        </p:txBody>
+      </p:sp>
+      <p:sp>
+        <p:nvSpPr>
+          <p:cNvPr id="23" name="Text 17"/>
+          <p:cNvSpPr/>
+          <p:nvPr/>
+        </p:nvSpPr>
+        <p:spPr>
+          <a:xfrm>
+            <a:off x="5090160" y="3952240"/>
             <a:ext cx="2011680" cy="528320"/>
           </a:xfrm>
           <a:prstGeom prst="rect">
@@ -12442,14 +12647,14 @@
       </p:sp>
       <p:sp>
         <p:nvSpPr>
-          <p:cNvPr id="12" name="Text 10"/>
-          <p:cNvSpPr/>
-          <p:nvPr/>
-        </p:nvSpPr>
-        <p:spPr>
-          <a:xfrm>
-            <a:off x="7279640" y="1812544"/>
-            <a:ext cx="2011680" cy="1320800"/>
+          <p:cNvPr id="24" name="Text 18"/>
+          <p:cNvSpPr/>
+          <p:nvPr/>
+        </p:nvSpPr>
+        <p:spPr>
+          <a:xfrm>
+            <a:off x="7279640" y="3521456"/>
+            <a:ext cx="2011680" cy="1219200"/>
           </a:xfrm>
           <a:prstGeom prst="rect">
             <a:avLst/>
@@ -12468,7 +12673,7 @@
               <a:buNone/>
             </a:pPr>
             <a:r>
-              <a:rPr lang="en-US" sz="2600" b="1" dirty="0">
+              <a:rPr lang="en-US" sz="2400" b="1" dirty="0">
                 <a:solidFill>
                   <a:srgbClr val="F5A524"/>
                 </a:solidFill>
@@ -12478,19 +12683,19 @@
               </a:rPr>
               <a:t>1.2M+</a:t>
             </a:r>
-            <a:endParaRPr lang="en-US" sz="2600" dirty="0"/>
-          </a:p>
-        </p:txBody>
-      </p:sp>
-      <p:sp>
-        <p:nvSpPr>
-          <p:cNvPr id="13" name="Text 11"/>
-          <p:cNvSpPr/>
-          <p:nvPr/>
-        </p:nvSpPr>
-        <p:spPr>
-          <a:xfrm>
-            <a:off x="7279640" y="2275840"/>
+            <a:endParaRPr lang="en-US" sz="2400" dirty="0"/>
+          </a:p>
+        </p:txBody>
+      </p:sp>
+      <p:sp>
+        <p:nvSpPr>
+          <p:cNvPr id="25" name="Text 19"/>
+          <p:cNvSpPr/>
+          <p:nvPr/>
+        </p:nvSpPr>
+        <p:spPr>
+          <a:xfrm>
+            <a:off x="7279640" y="3952240"/>
             <a:ext cx="2011680" cy="528320"/>
           </a:xfrm>
           <a:prstGeom prst="rect">
@@ -12518,7 +12723,7 @@
                 <a:ea typeface="Arial" pitchFamily="34" charset="-122"/>
                 <a:cs typeface="Arial" pitchFamily="34" charset="-120"/>
               </a:rPr>
-              <a:t>teachers reached via Nigeria Teachers</a:t>
+              <a:t>teachers via Nigeria Teachers</a:t>
             </a:r>
             <a:endParaRPr lang="en-US" sz="1000" dirty="0"/>
           </a:p>
@@ -12526,14 +12731,14 @@
       </p:sp>
       <p:sp>
         <p:nvSpPr>
-          <p:cNvPr id="14" name="Text 12"/>
-          <p:cNvSpPr/>
-          <p:nvPr/>
-        </p:nvSpPr>
-        <p:spPr>
-          <a:xfrm>
-            <a:off x="9469120" y="1812544"/>
-            <a:ext cx="2011680" cy="1320800"/>
+          <p:cNvPr id="26" name="Text 20"/>
+          <p:cNvSpPr/>
+          <p:nvPr/>
+        </p:nvSpPr>
+        <p:spPr>
+          <a:xfrm>
+            <a:off x="9469120" y="3521456"/>
+            <a:ext cx="2011680" cy="1219200"/>
           </a:xfrm>
           <a:prstGeom prst="rect">
             <a:avLst/>
@@ -12552,7 +12757,7 @@
               <a:buNone/>
             </a:pPr>
             <a:r>
-              <a:rPr lang="en-US" sz="2600" b="1" dirty="0">
+              <a:rPr lang="en-US" sz="2400" b="1" dirty="0">
                 <a:solidFill>
                   <a:srgbClr val="F5A524"/>
                 </a:solidFill>
@@ -12562,19 +12767,19 @@
               </a:rPr>
               <a:t>100+</a:t>
             </a:r>
-            <a:endParaRPr lang="en-US" sz="2600" dirty="0"/>
-          </a:p>
-        </p:txBody>
-      </p:sp>
-      <p:sp>
-        <p:nvSpPr>
-          <p:cNvPr id="15" name="Text 13"/>
-          <p:cNvSpPr/>
-          <p:nvPr/>
-        </p:nvSpPr>
-        <p:spPr>
-          <a:xfrm>
-            <a:off x="9469120" y="2275840"/>
+            <a:endParaRPr lang="en-US" sz="2400" dirty="0"/>
+          </a:p>
+        </p:txBody>
+      </p:sp>
+      <p:sp>
+        <p:nvSpPr>
+          <p:cNvPr id="27" name="Text 21"/>
+          <p:cNvSpPr/>
+          <p:nvPr/>
+        </p:nvSpPr>
+        <p:spPr>
+          <a:xfrm>
+            <a:off x="9469120" y="3952240"/>
             <a:ext cx="2011680" cy="528320"/>
           </a:xfrm>
           <a:prstGeom prst="rect">
@@ -12610,13 +12815,13 @@
       </p:sp>
       <p:sp>
         <p:nvSpPr>
-          <p:cNvPr id="16" name="Shape 14"/>
-          <p:cNvSpPr/>
-          <p:nvPr/>
-        </p:nvSpPr>
-        <p:spPr>
-          <a:xfrm>
-            <a:off x="711200" y="2997200"/>
+          <p:cNvPr id="28" name="Shape 22"/>
+          <p:cNvSpPr/>
+          <p:nvPr/>
+        </p:nvSpPr>
+        <p:spPr>
+          <a:xfrm>
+            <a:off x="711200" y="4521200"/>
             <a:ext cx="10769600" cy="0"/>
           </a:xfrm>
           <a:prstGeom prst="line">
@@ -12633,13 +12838,13 @@
       </p:sp>
       <p:sp>
         <p:nvSpPr>
-          <p:cNvPr id="17" name="Text 15"/>
-          <p:cNvSpPr/>
-          <p:nvPr/>
-        </p:nvSpPr>
-        <p:spPr>
-          <a:xfrm>
-            <a:off x="711200" y="3166618"/>
+          <p:cNvPr id="29" name="Text 23"/>
+          <p:cNvSpPr/>
+          <p:nvPr/>
+        </p:nvSpPr>
+        <p:spPr>
+          <a:xfrm>
+            <a:off x="711200" y="4639818"/>
             <a:ext cx="7112000" cy="482600"/>
           </a:xfrm>
           <a:prstGeom prst="rect">
@@ -12675,14 +12880,14 @@
       </p:sp>
       <p:sp>
         <p:nvSpPr>
-          <p:cNvPr id="18" name="Text 16"/>
-          <p:cNvSpPr/>
-          <p:nvPr/>
-        </p:nvSpPr>
-        <p:spPr>
-          <a:xfrm>
-            <a:off x="711200" y="3412744"/>
-            <a:ext cx="2011680" cy="1320800"/>
+          <p:cNvPr id="30" name="Text 24"/>
+          <p:cNvSpPr/>
+          <p:nvPr/>
+        </p:nvSpPr>
+        <p:spPr>
+          <a:xfrm>
+            <a:off x="711200" y="4867656"/>
+            <a:ext cx="2011680" cy="1219200"/>
           </a:xfrm>
           <a:prstGeom prst="rect">
             <a:avLst/>
@@ -12701,7 +12906,7 @@
               <a:buNone/>
             </a:pPr>
             <a:r>
-              <a:rPr lang="en-US" sz="2600" b="1" dirty="0">
+              <a:rPr lang="en-US" sz="2400" b="1" dirty="0">
                 <a:solidFill>
                   <a:srgbClr val="EE1B24"/>
                 </a:solidFill>
@@ -12711,19 +12916,19 @@
               </a:rPr>
               <a:t>18</a:t>
             </a:r>
-            <a:endParaRPr lang="en-US" sz="2600" dirty="0"/>
-          </a:p>
-        </p:txBody>
-      </p:sp>
-      <p:sp>
-        <p:nvSpPr>
-          <p:cNvPr id="19" name="Text 17"/>
-          <p:cNvSpPr/>
-          <p:nvPr/>
-        </p:nvSpPr>
-        <p:spPr>
-          <a:xfrm>
-            <a:off x="711200" y="3876040"/>
+            <a:endParaRPr lang="en-US" sz="2400" dirty="0"/>
+          </a:p>
+        </p:txBody>
+      </p:sp>
+      <p:sp>
+        <p:nvSpPr>
+          <p:cNvPr id="31" name="Text 25"/>
+          <p:cNvSpPr/>
+          <p:nvPr/>
+        </p:nvSpPr>
+        <p:spPr>
+          <a:xfrm>
+            <a:off x="711200" y="5298440"/>
             <a:ext cx="2011680" cy="528320"/>
           </a:xfrm>
           <a:prstGeom prst="rect">
@@ -12751,7 +12956,7 @@
                 <a:ea typeface="Arial" pitchFamily="34" charset="-122"/>
                 <a:cs typeface="Arial" pitchFamily="34" charset="-120"/>
               </a:rPr>
-              <a:t>drills, each machine-proved solvable</a:t>
+              <a:t>drills, each proved solvable</a:t>
             </a:r>
             <a:endParaRPr lang="en-US" sz="1000" dirty="0"/>
           </a:p>
@@ -12759,14 +12964,14 @@
       </p:sp>
       <p:sp>
         <p:nvSpPr>
-          <p:cNvPr id="20" name="Text 18"/>
-          <p:cNvSpPr/>
-          <p:nvPr/>
-        </p:nvSpPr>
-        <p:spPr>
-          <a:xfrm>
-            <a:off x="2900680" y="3412744"/>
-            <a:ext cx="2011680" cy="1320800"/>
+          <p:cNvPr id="32" name="Text 26"/>
+          <p:cNvSpPr/>
+          <p:nvPr/>
+        </p:nvSpPr>
+        <p:spPr>
+          <a:xfrm>
+            <a:off x="2900680" y="4867656"/>
+            <a:ext cx="2011680" cy="1219200"/>
           </a:xfrm>
           <a:prstGeom prst="rect">
             <a:avLst/>
@@ -12785,7 +12990,7 @@
               <a:buNone/>
             </a:pPr>
             <a:r>
-              <a:rPr lang="en-US" sz="2600" b="1" dirty="0">
+              <a:rPr lang="en-US" sz="2400" b="1" dirty="0">
                 <a:solidFill>
                   <a:srgbClr val="EE1B24"/>
                 </a:solidFill>
@@ -12795,19 +13000,19 @@
               </a:rPr>
               <a:t>6</a:t>
             </a:r>
-            <a:endParaRPr lang="en-US" sz="2600" dirty="0"/>
-          </a:p>
-        </p:txBody>
-      </p:sp>
-      <p:sp>
-        <p:nvSpPr>
-          <p:cNvPr id="21" name="Text 19"/>
-          <p:cNvSpPr/>
-          <p:nvPr/>
-        </p:nvSpPr>
-        <p:spPr>
-          <a:xfrm>
-            <a:off x="2900680" y="3876040"/>
+            <a:endParaRPr lang="en-US" sz="2400" dirty="0"/>
+          </a:p>
+        </p:txBody>
+      </p:sp>
+      <p:sp>
+        <p:nvSpPr>
+          <p:cNvPr id="33" name="Text 27"/>
+          <p:cNvSpPr/>
+          <p:nvPr/>
+        </p:nvSpPr>
+        <p:spPr>
+          <a:xfrm>
+            <a:off x="2900680" y="5298440"/>
             <a:ext cx="2011680" cy="528320"/>
           </a:xfrm>
           <a:prstGeom prst="rect">
@@ -12835,7 +13040,7 @@
                 <a:ea typeface="Arial" pitchFamily="34" charset="-122"/>
                 <a:cs typeface="Arial" pitchFamily="34" charset="-120"/>
               </a:rPr>
-              <a:t>disciplines, with guided builds</a:t>
+              <a:t>disciplines with guided builds</a:t>
             </a:r>
             <a:endParaRPr lang="en-US" sz="1000" dirty="0"/>
           </a:p>
@@ -12843,14 +13048,14 @@
       </p:sp>
       <p:sp>
         <p:nvSpPr>
-          <p:cNvPr id="22" name="Text 20"/>
-          <p:cNvSpPr/>
-          <p:nvPr/>
-        </p:nvSpPr>
-        <p:spPr>
-          <a:xfrm>
-            <a:off x="5090160" y="3412744"/>
-            <a:ext cx="2011680" cy="1320800"/>
+          <p:cNvPr id="34" name="Text 28"/>
+          <p:cNvSpPr/>
+          <p:nvPr/>
+        </p:nvSpPr>
+        <p:spPr>
+          <a:xfrm>
+            <a:off x="5090160" y="4867656"/>
+            <a:ext cx="2011680" cy="1219200"/>
           </a:xfrm>
           <a:prstGeom prst="rect">
             <a:avLst/>
@@ -12869,7 +13074,7 @@
               <a:buNone/>
             </a:pPr>
             <a:r>
-              <a:rPr lang="en-US" sz="2600" b="1" dirty="0">
+              <a:rPr lang="en-US" sz="2400" b="1" dirty="0">
                 <a:solidFill>
                   <a:srgbClr val="EE1B24"/>
                 </a:solidFill>
@@ -12879,19 +13084,19 @@
               </a:rPr>
               <a:t>94</a:t>
             </a:r>
-            <a:endParaRPr lang="en-US" sz="2600" dirty="0"/>
-          </a:p>
-        </p:txBody>
-      </p:sp>
-      <p:sp>
-        <p:nvSpPr>
-          <p:cNvPr id="23" name="Text 21"/>
-          <p:cNvSpPr/>
-          <p:nvPr/>
-        </p:nvSpPr>
-        <p:spPr>
-          <a:xfrm>
-            <a:off x="5090160" y="3876040"/>
+            <a:endParaRPr lang="en-US" sz="2400" dirty="0"/>
+          </a:p>
+        </p:txBody>
+      </p:sp>
+      <p:sp>
+        <p:nvSpPr>
+          <p:cNvPr id="35" name="Text 29"/>
+          <p:cNvSpPr/>
+          <p:nvPr/>
+        </p:nvSpPr>
+        <p:spPr>
+          <a:xfrm>
+            <a:off x="5090160" y="5298440"/>
             <a:ext cx="2011680" cy="528320"/>
           </a:xfrm>
           <a:prstGeom prst="rect">
@@ -12919,7 +13124,7 @@
                 <a:ea typeface="Arial" pitchFamily="34" charset="-122"/>
                 <a:cs typeface="Arial" pitchFamily="34" charset="-120"/>
               </a:rPr>
-              <a:t>roadmaps, pulled live from source</a:t>
+              <a:t>roadmaps pulled live</a:t>
             </a:r>
             <a:endParaRPr lang="en-US" sz="1000" dirty="0"/>
           </a:p>
@@ -12927,14 +13132,14 @@
       </p:sp>
       <p:sp>
         <p:nvSpPr>
-          <p:cNvPr id="24" name="Text 22"/>
-          <p:cNvSpPr/>
-          <p:nvPr/>
-        </p:nvSpPr>
-        <p:spPr>
-          <a:xfrm>
-            <a:off x="7279640" y="3412744"/>
-            <a:ext cx="2011680" cy="1320800"/>
+          <p:cNvPr id="36" name="Text 30"/>
+          <p:cNvSpPr/>
+          <p:nvPr/>
+        </p:nvSpPr>
+        <p:spPr>
+          <a:xfrm>
+            <a:off x="7279640" y="4867656"/>
+            <a:ext cx="2011680" cy="1219200"/>
           </a:xfrm>
           <a:prstGeom prst="rect">
             <a:avLst/>
@@ -12953,7 +13158,7 @@
               <a:buNone/>
             </a:pPr>
             <a:r>
-              <a:rPr lang="en-US" sz="2600" b="1" dirty="0">
+              <a:rPr lang="en-US" sz="2400" b="1" dirty="0">
                 <a:solidFill>
                   <a:srgbClr val="EE1B24"/>
                 </a:solidFill>
@@ -12963,19 +13168,19 @@
               </a:rPr>
               <a:t>250</a:t>
             </a:r>
-            <a:endParaRPr lang="en-US" sz="2600" dirty="0"/>
-          </a:p>
-        </p:txBody>
-      </p:sp>
-      <p:sp>
-        <p:nvSpPr>
-          <p:cNvPr id="25" name="Text 23"/>
-          <p:cNvSpPr/>
-          <p:nvPr/>
-        </p:nvSpPr>
-        <p:spPr>
-          <a:xfrm>
-            <a:off x="7279640" y="3876040"/>
+            <a:endParaRPr lang="en-US" sz="2400" dirty="0"/>
+          </a:p>
+        </p:txBody>
+      </p:sp>
+      <p:sp>
+        <p:nvSpPr>
+          <p:cNvPr id="37" name="Text 31"/>
+          <p:cNvSpPr/>
+          <p:nvPr/>
+        </p:nvSpPr>
+        <p:spPr>
+          <a:xfrm>
+            <a:off x="7279640" y="5298440"/>
             <a:ext cx="2011680" cy="528320"/>
           </a:xfrm>
           <a:prstGeom prst="rect">
@@ -13011,14 +13216,14 @@
       </p:sp>
       <p:sp>
         <p:nvSpPr>
-          <p:cNvPr id="26" name="Text 24"/>
-          <p:cNvSpPr/>
-          <p:nvPr/>
-        </p:nvSpPr>
-        <p:spPr>
-          <a:xfrm>
-            <a:off x="9469120" y="3412744"/>
-            <a:ext cx="2011680" cy="1320800"/>
+          <p:cNvPr id="38" name="Text 32"/>
+          <p:cNvSpPr/>
+          <p:nvPr/>
+        </p:nvSpPr>
+        <p:spPr>
+          <a:xfrm>
+            <a:off x="9469120" y="4867656"/>
+            <a:ext cx="2011680" cy="1219200"/>
           </a:xfrm>
           <a:prstGeom prst="rect">
             <a:avLst/>
@@ -13037,7 +13242,7 @@
               <a:buNone/>
             </a:pPr>
             <a:r>
-              <a:rPr lang="en-US" sz="2600" b="1" dirty="0">
+              <a:rPr lang="en-US" sz="2400" b="1" dirty="0">
                 <a:solidFill>
                   <a:srgbClr val="EE1B24"/>
                 </a:solidFill>
@@ -13047,19 +13252,19 @@
               </a:rPr>
               <a:t>154</a:t>
             </a:r>
-            <a:endParaRPr lang="en-US" sz="2600" dirty="0"/>
-          </a:p>
-        </p:txBody>
-      </p:sp>
-      <p:sp>
-        <p:nvSpPr>
-          <p:cNvPr id="27" name="Text 25"/>
-          <p:cNvSpPr/>
-          <p:nvPr/>
-        </p:nvSpPr>
-        <p:spPr>
-          <a:xfrm>
-            <a:off x="9469120" y="3876040"/>
+            <a:endParaRPr lang="en-US" sz="2400" dirty="0"/>
+          </a:p>
+        </p:txBody>
+      </p:sp>
+      <p:sp>
+        <p:nvSpPr>
+          <p:cNvPr id="39" name="Text 33"/>
+          <p:cNvSpPr/>
+          <p:nvPr/>
+        </p:nvSpPr>
+        <p:spPr>
+          <a:xfrm>
+            <a:off x="9469120" y="5298440"/>
             <a:ext cx="2011680" cy="528320"/>
           </a:xfrm>
           <a:prstGeom prst="rect">
@@ -13095,63 +13300,41 @@
       </p:sp>
       <p:sp>
         <p:nvSpPr>
-          <p:cNvPr id="28" name="Shape 26"/>
-          <p:cNvSpPr/>
-          <p:nvPr/>
-        </p:nvSpPr>
-        <p:spPr>
-          <a:xfrm>
-            <a:off x="711200" y="4648200"/>
-            <a:ext cx="10769600" cy="1041400"/>
-          </a:xfrm>
-          <a:prstGeom prst="roundRect">
-            <a:avLst>
-              <a:gd name="adj" fmla="val 9756"/>
-            </a:avLst>
-          </a:prstGeom>
-          <a:solidFill>
-            <a:srgbClr val="17181B"/>
-          </a:solidFill>
-          <a:ln/>
-        </p:spPr>
-      </p:sp>
-      <p:sp>
-        <p:nvSpPr>
-          <p:cNvPr id="29" name="Text 27"/>
-          <p:cNvSpPr/>
-          <p:nvPr/>
-        </p:nvSpPr>
-        <p:spPr>
-          <a:xfrm>
-            <a:off x="1016000" y="4868418"/>
-            <a:ext cx="3810000" cy="482600"/>
-          </a:xfrm>
-          <a:prstGeom prst="rect">
-            <a:avLst/>
-          </a:prstGeom>
-          <a:noFill/>
-          <a:ln/>
-        </p:spPr>
-        <p:txBody>
-          <a:bodyPr wrap="square" lIns="0" tIns="0" rIns="0" bIns="0" rtlCol="0" anchor="t"/>
-          <a:lstStyle/>
-          <a:p>
-            <a:pPr algn="l" indent="0" marL="0">
-              <a:lnSpc>
-                <a:spcPct val="125000"/>
-              </a:lnSpc>
-              <a:buNone/>
-            </a:pPr>
-            <a:r>
-              <a:rPr lang="en-US" sz="950" b="1" spc="120" kern="0" dirty="0">
-                <a:solidFill>
-                  <a:srgbClr val="71777E"/>
-                </a:solidFill>
-                <a:latin typeface="Arial" pitchFamily="34" charset="0"/>
-                <a:ea typeface="Arial" pitchFamily="34" charset="-122"/>
-                <a:cs typeface="Arial" pitchFamily="34" charset="-120"/>
-              </a:rPr>
-              <a:t>PARTNERS AND PROGRAMMES</a:t>
+          <p:cNvPr id="40" name="Text 34"/>
+          <p:cNvSpPr/>
+          <p:nvPr/>
+        </p:nvSpPr>
+        <p:spPr>
+          <a:xfrm>
+            <a:off x="711200" y="5833618"/>
+            <a:ext cx="10769600" cy="540512"/>
+          </a:xfrm>
+          <a:prstGeom prst="rect">
+            <a:avLst/>
+          </a:prstGeom>
+          <a:noFill/>
+          <a:ln/>
+        </p:spPr>
+        <p:txBody>
+          <a:bodyPr wrap="square" lIns="0" tIns="0" rIns="0" bIns="0" rtlCol="0" anchor="t"/>
+          <a:lstStyle/>
+          <a:p>
+            <a:pPr algn="l" indent="0" marL="0">
+              <a:lnSpc>
+                <a:spcPct val="140000"/>
+              </a:lnSpc>
+              <a:buNone/>
+            </a:pPr>
+            <a:r>
+              <a:rPr lang="en-US" sz="950" dirty="0">
+                <a:solidFill>
+                  <a:srgbClr val="A5ABB3"/>
+                </a:solidFill>
+                <a:latin typeface="Arial" pitchFamily="34" charset="0"/>
+                <a:ea typeface="Arial" pitchFamily="34" charset="-122"/>
+                <a:cs typeface="Arial" pitchFamily="34" charset="-120"/>
+              </a:rPr>
+              <a:t>Federal Government: co-partner on the national refugee re-skilling programme. Nigeria Teachers (1.2M+ members). UNILAG, FUTO, UNICAL, LASU, UNIBEN and Bauchi State University. Ten AI labs being set up in schools.</a:t>
             </a:r>
             <a:endParaRPr lang="en-US" sz="950" dirty="0"/>
           </a:p>
@@ -13159,49 +13342,7 @@
       </p:sp>
       <p:sp>
         <p:nvSpPr>
-          <p:cNvPr id="30" name="Text 28"/>
-          <p:cNvSpPr/>
-          <p:nvPr/>
-        </p:nvSpPr>
-        <p:spPr>
-          <a:xfrm>
-            <a:off x="1016000" y="5144262"/>
-            <a:ext cx="10160000" cy="618744"/>
-          </a:xfrm>
-          <a:prstGeom prst="rect">
-            <a:avLst/>
-          </a:prstGeom>
-          <a:noFill/>
-          <a:ln/>
-        </p:spPr>
-        <p:txBody>
-          <a:bodyPr wrap="square" lIns="0" tIns="0" rIns="0" bIns="0" rtlCol="0" anchor="t"/>
-          <a:lstStyle/>
-          <a:p>
-            <a:pPr algn="l" indent="0" marL="0">
-              <a:lnSpc>
-                <a:spcPct val="145000"/>
-              </a:lnSpc>
-              <a:buNone/>
-            </a:pPr>
-            <a:r>
-              <a:rPr lang="en-US" sz="1050" dirty="0">
-                <a:solidFill>
-                  <a:srgbClr val="A5ABB3"/>
-                </a:solidFill>
-                <a:latin typeface="Arial" pitchFamily="34" charset="0"/>
-                <a:ea typeface="Arial" pitchFamily="34" charset="-122"/>
-                <a:cs typeface="Arial" pitchFamily="34" charset="-120"/>
-              </a:rPr>
-              <a:t>Federal Government — co-partner on the national refugee re-skilling programme  ·  Nigeria Teachers (1.2M+ members)  ·  UNILAG · FUTO · UNICAL · LASU · UNIBEN · Bauchi State University  ·  10 AI labs being set up in schools</a:t>
-            </a:r>
-            <a:endParaRPr lang="en-US" sz="1050" dirty="0"/>
-          </a:p>
-        </p:txBody>
-      </p:sp>
-      <p:sp>
-        <p:nvSpPr>
-          <p:cNvPr id="31" name="Shape 29"/>
+          <p:cNvPr id="41" name="Shape 35"/>
           <p:cNvSpPr/>
           <p:nvPr/>
         </p:nvSpPr>
@@ -13224,7 +13365,7 @@
       </p:sp>
       <p:sp>
         <p:nvSpPr>
-          <p:cNvPr id="32" name="Text 30"/>
+          <p:cNvPr id="42" name="Text 36"/>
           <p:cNvSpPr/>
           <p:nvPr/>
         </p:nvSpPr>
@@ -13266,7 +13407,7 @@
       </p:sp>
       <p:sp>
         <p:nvSpPr>
-          <p:cNvPr id="33" name="Text 31"/>
+          <p:cNvPr id="43" name="Text 37"/>
           <p:cNvSpPr/>
           <p:nvPr/>
         </p:nvSpPr>
@@ -13436,7 +13577,7 @@
                 <a:ea typeface="Arial" pitchFamily="34" charset="-122"/>
                 <a:cs typeface="Arial" pitchFamily="34" charset="-120"/>
               </a:rPr>
-              <a:t>A young continent, and a skill</a:t>
+              <a:t>65 million students, and almost no</a:t>
             </a:r>
             <a:endParaRPr lang="en-US" sz="3000" dirty="0"/>
           </a:p>
@@ -13456,7 +13597,7 @@
                 <a:ea typeface="Arial" pitchFamily="34" charset="-122"/>
                 <a:cs typeface="Arial" pitchFamily="34" charset="-120"/>
               </a:rPr>
-              <a:t>the world has not taught yet.</a:t>
+              <a:t>training in how AI systems fail.</a:t>
             </a:r>
             <a:endParaRPr lang="en-US" sz="3000" dirty="0"/>
           </a:p>
@@ -14314,7 +14455,7 @@
                 <a:ea typeface="Arial" pitchFamily="34" charset="-122"/>
                 <a:cs typeface="Arial" pitchFamily="34" charset="-120"/>
               </a:rPr>
-              <a:t>Every company is being told to add AI. Almost none of them have anyone who can make an agent behave under failure, attack or cost pressure.</a:t>
+              <a:t>Boards are telling their teams to add AI. Few of those teams have anyone who can make an agent behave under failure, attack or cost pressure.</a:t>
             </a:r>
             <a:endParaRPr lang="en-US" sz="1150" dirty="0"/>
           </a:p>
@@ -14356,7 +14497,7 @@
                 <a:ea typeface="Arial" pitchFamily="34" charset="-122"/>
                 <a:cs typeface="Arial" pitchFamily="34" charset="-120"/>
               </a:rPr>
-              <a:t>UloX is free to learn on, in the browser, and already live. The market path is the one Ulo has already walked: Nigeria → West Africa → Africa → emerging markets.</a:t>
+              <a:t>UloX runs free in a browser and is live today. The route to market is the one Ulo has already walked: Nigeria, then West Africa, then the wider continent.</a:t>
             </a:r>
             <a:endParaRPr lang="en-US" sz="1150" dirty="0"/>
           </a:p>

--- a/deck/VerionX-UloX-Deck-2026.pptx
+++ b/deck/VerionX-UloX-Deck-2026.pptx
@@ -1787,7 +1787,7 @@
       </p:sp>
       <p:pic>
         <p:nvPicPr>
-          <p:cNvPr id="3" name="Image 0" descr="C:\Users\HP 830 G7 COREI5\OneDrive\Desktop\Composio\ulox\deck\assets\ikoyi-classroom.jpg">    </p:cNvPr>
+          <p:cNvPr id="3" name="Image 0" descr="C:\Users\HP 830 G7 COREI5\OneDrive\Desktop\Composio\ulox\deck\assets\cover-classroom.jpg">    </p:cNvPr>
           <p:cNvPicPr>
             <a:picLocks noChangeAspect="1"/>
           </p:cNvPicPr>
@@ -1800,8 +1800,8 @@
         </p:blipFill>
         <p:spPr>
           <a:xfrm>
-            <a:off x="5969000" y="0"/>
-            <a:ext cx="6223000" cy="6858000"/>
+            <a:off x="7315200" y="0"/>
+            <a:ext cx="4876800" cy="6858000"/>
           </a:xfrm>
           <a:prstGeom prst="rect">
             <a:avLst/>
@@ -1816,16 +1816,14 @@
         </p:nvSpPr>
         <p:spPr>
           <a:xfrm>
-            <a:off x="5969000" y="0"/>
-            <a:ext cx="2159000" cy="6858000"/>
-          </a:xfrm>
-          <a:prstGeom prst="rect">
-            <a:avLst/>
-          </a:prstGeom>
-          <a:solidFill>
-            <a:srgbClr val="0E0F11">
-              <a:alpha val="92000"/>
-            </a:srgbClr>
+            <a:off x="7264400" y="0"/>
+            <a:ext cx="50800" cy="6858000"/>
+          </a:xfrm>
+          <a:prstGeom prst="rect">
+            <a:avLst/>
+          </a:prstGeom>
+          <a:solidFill>
+            <a:srgbClr val="EE1B24"/>
           </a:solidFill>
           <a:ln/>
         </p:spPr>
@@ -1833,28 +1831,6 @@
       <p:sp>
         <p:nvSpPr>
           <p:cNvPr id="5" name="Shape 2"/>
-          <p:cNvSpPr/>
-          <p:nvPr/>
-        </p:nvSpPr>
-        <p:spPr>
-          <a:xfrm>
-            <a:off x="8128000" y="0"/>
-            <a:ext cx="4191000" cy="6858000"/>
-          </a:xfrm>
-          <a:prstGeom prst="rect">
-            <a:avLst/>
-          </a:prstGeom>
-          <a:solidFill>
-            <a:srgbClr val="0E0F11">
-              <a:alpha val="28000"/>
-            </a:srgbClr>
-          </a:solidFill>
-          <a:ln/>
-        </p:spPr>
-      </p:sp>
-      <p:sp>
-        <p:nvSpPr>
-          <p:cNvPr id="6" name="Shape 3"/>
           <p:cNvSpPr/>
           <p:nvPr/>
         </p:nvSpPr>
@@ -1874,33 +1850,117 @@
       </p:sp>
       <p:sp>
         <p:nvSpPr>
+          <p:cNvPr id="6" name="Text 3"/>
+          <p:cNvSpPr/>
+          <p:nvPr/>
+        </p:nvSpPr>
+        <p:spPr>
+          <a:xfrm>
+            <a:off x="711200" y="1369060"/>
+            <a:ext cx="5892800" cy="762000"/>
+          </a:xfrm>
+          <a:prstGeom prst="rect">
+            <a:avLst/>
+          </a:prstGeom>
+          <a:noFill/>
+          <a:ln/>
+        </p:spPr>
+        <p:txBody>
+          <a:bodyPr wrap="square" lIns="0" tIns="0" rIns="0" bIns="0" rtlCol="0" anchor="t"/>
+          <a:lstStyle/>
+          <a:p>
+            <a:pPr algn="l" indent="0" marL="0">
+              <a:lnSpc>
+                <a:spcPct val="125000"/>
+              </a:lnSpc>
+              <a:buNone/>
+            </a:pPr>
+            <a:r>
+              <a:rPr lang="en-US" sz="1500" b="1" spc="240" kern="0" dirty="0">
+                <a:solidFill>
+                  <a:srgbClr val="EE1B24"/>
+                </a:solidFill>
+                <a:latin typeface="Arial" pitchFamily="34" charset="0"/>
+                <a:ea typeface="Arial" pitchFamily="34" charset="-122"/>
+                <a:cs typeface="Arial" pitchFamily="34" charset="-120"/>
+              </a:rPr>
+              <a:t>VerionX</a:t>
+            </a:r>
+            <a:endParaRPr lang="en-US" sz="1500" dirty="0"/>
+          </a:p>
+        </p:txBody>
+      </p:sp>
+      <p:sp>
+        <p:nvSpPr>
           <p:cNvPr id="7" name="Text 4"/>
           <p:cNvSpPr/>
           <p:nvPr/>
         </p:nvSpPr>
         <p:spPr>
           <a:xfrm>
-            <a:off x="711200" y="1369060"/>
-            <a:ext cx="5842000" cy="762000"/>
-          </a:xfrm>
-          <a:prstGeom prst="rect">
-            <a:avLst/>
-          </a:prstGeom>
-          <a:noFill/>
-          <a:ln/>
-        </p:spPr>
-        <p:txBody>
-          <a:bodyPr wrap="square" lIns="0" tIns="0" rIns="0" bIns="0" rtlCol="0" anchor="t"/>
-          <a:lstStyle/>
-          <a:p>
-            <a:pPr algn="l" indent="0" marL="0">
-              <a:lnSpc>
-                <a:spcPct val="125000"/>
-              </a:lnSpc>
-              <a:buNone/>
-            </a:pPr>
-            <a:r>
-              <a:rPr lang="en-US" sz="1500" b="1" spc="240" kern="0" dirty="0">
+            <a:off x="711200" y="1773428"/>
+            <a:ext cx="5892800" cy="1623974"/>
+          </a:xfrm>
+          <a:prstGeom prst="rect">
+            <a:avLst/>
+          </a:prstGeom>
+          <a:noFill/>
+          <a:ln/>
+        </p:spPr>
+        <p:txBody>
+          <a:bodyPr wrap="square" lIns="0" tIns="0" rIns="0" bIns="0" rtlCol="0" anchor="t"/>
+          <a:lstStyle/>
+          <a:p>
+            <a:pPr algn="l" indent="0" marL="0">
+              <a:lnSpc>
+                <a:spcPct val="108000"/>
+              </a:lnSpc>
+              <a:buNone/>
+            </a:pPr>
+            <a:r>
+              <a:rPr lang="en-US" sz="3700" b="1" dirty="0">
+                <a:solidFill>
+                  <a:srgbClr val="FFFFFF"/>
+                </a:solidFill>
+                <a:latin typeface="Arial" pitchFamily="34" charset="0"/>
+                <a:ea typeface="Arial" pitchFamily="34" charset="-122"/>
+                <a:cs typeface="Arial" pitchFamily="34" charset="-120"/>
+              </a:rPr>
+              <a:t>Building the workforce</a:t>
+            </a:r>
+            <a:endParaRPr lang="en-US" sz="3700" dirty="0"/>
+          </a:p>
+        </p:txBody>
+      </p:sp>
+      <p:sp>
+        <p:nvSpPr>
+          <p:cNvPr id="8" name="Text 5"/>
+          <p:cNvSpPr/>
+          <p:nvPr/>
+        </p:nvSpPr>
+        <p:spPr>
+          <a:xfrm>
+            <a:off x="711200" y="2306828"/>
+            <a:ext cx="5892800" cy="1623974"/>
+          </a:xfrm>
+          <a:prstGeom prst="rect">
+            <a:avLst/>
+          </a:prstGeom>
+          <a:noFill/>
+          <a:ln/>
+        </p:spPr>
+        <p:txBody>
+          <a:bodyPr wrap="square" lIns="0" tIns="0" rIns="0" bIns="0" rtlCol="0" anchor="t"/>
+          <a:lstStyle/>
+          <a:p>
+            <a:pPr algn="l" indent="0" marL="0">
+              <a:lnSpc>
+                <a:spcPct val="108000"/>
+              </a:lnSpc>
+              <a:buNone/>
+            </a:pPr>
+            <a:r>
+              <a:rPr lang="en-US" sz="3700" b="1" dirty="0">
                 <a:solidFill>
                   <a:srgbClr val="EE1B24"/>
                 </a:solidFill>
@@ -1908,49 +1968,7 @@
                 <a:ea typeface="Arial" pitchFamily="34" charset="-122"/>
                 <a:cs typeface="Arial" pitchFamily="34" charset="-120"/>
               </a:rPr>
-              <a:t>VerionX</a:t>
-            </a:r>
-            <a:endParaRPr lang="en-US" sz="1500" dirty="0"/>
-          </a:p>
-        </p:txBody>
-      </p:sp>
-      <p:sp>
-        <p:nvSpPr>
-          <p:cNvPr id="8" name="Text 5"/>
-          <p:cNvSpPr/>
-          <p:nvPr/>
-        </p:nvSpPr>
-        <p:spPr>
-          <a:xfrm>
-            <a:off x="711200" y="1773428"/>
-            <a:ext cx="5969000" cy="1623974"/>
-          </a:xfrm>
-          <a:prstGeom prst="rect">
-            <a:avLst/>
-          </a:prstGeom>
-          <a:noFill/>
-          <a:ln/>
-        </p:spPr>
-        <p:txBody>
-          <a:bodyPr wrap="square" lIns="0" tIns="0" rIns="0" bIns="0" rtlCol="0" anchor="t"/>
-          <a:lstStyle/>
-          <a:p>
-            <a:pPr algn="l" indent="0" marL="0">
-              <a:lnSpc>
-                <a:spcPct val="108000"/>
-              </a:lnSpc>
-              <a:buNone/>
-            </a:pPr>
-            <a:r>
-              <a:rPr lang="en-US" sz="3700" b="1" dirty="0">
-                <a:solidFill>
-                  <a:srgbClr val="FFFFFF"/>
-                </a:solidFill>
-                <a:latin typeface="Arial" pitchFamily="34" charset="0"/>
-                <a:ea typeface="Arial" pitchFamily="34" charset="-122"/>
-                <a:cs typeface="Arial" pitchFamily="34" charset="-120"/>
-              </a:rPr>
-              <a:t>Building the workforce</a:t>
+              <a:t>for the future.</a:t>
             </a:r>
             <a:endParaRPr lang="en-US" sz="3700" dirty="0"/>
           </a:p>
@@ -1964,50 +1982,8 @@
         </p:nvSpPr>
         <p:spPr>
           <a:xfrm>
-            <a:off x="711200" y="2306828"/>
-            <a:ext cx="5969000" cy="1623974"/>
-          </a:xfrm>
-          <a:prstGeom prst="rect">
-            <a:avLst/>
-          </a:prstGeom>
-          <a:noFill/>
-          <a:ln/>
-        </p:spPr>
-        <p:txBody>
-          <a:bodyPr wrap="square" lIns="0" tIns="0" rIns="0" bIns="0" rtlCol="0" anchor="t"/>
-          <a:lstStyle/>
-          <a:p>
-            <a:pPr algn="l" indent="0" marL="0">
-              <a:lnSpc>
-                <a:spcPct val="108000"/>
-              </a:lnSpc>
-              <a:buNone/>
-            </a:pPr>
-            <a:r>
-              <a:rPr lang="en-US" sz="3700" b="1" dirty="0">
-                <a:solidFill>
-                  <a:srgbClr val="EE1B24"/>
-                </a:solidFill>
-                <a:latin typeface="Arial" pitchFamily="34" charset="0"/>
-                <a:ea typeface="Arial" pitchFamily="34" charset="-122"/>
-                <a:cs typeface="Arial" pitchFamily="34" charset="-120"/>
-              </a:rPr>
-              <a:t>for the future.</a:t>
-            </a:r>
-            <a:endParaRPr lang="en-US" sz="3700" dirty="0"/>
-          </a:p>
-        </p:txBody>
-      </p:sp>
-      <p:sp>
-        <p:nvSpPr>
-          <p:cNvPr id="10" name="Text 7"/>
-          <p:cNvSpPr/>
-          <p:nvPr/>
-        </p:nvSpPr>
-        <p:spPr>
-          <a:xfrm>
             <a:off x="711200" y="3330194"/>
-            <a:ext cx="4978400" cy="822960"/>
+            <a:ext cx="5892800" cy="822960"/>
           </a:xfrm>
           <a:prstGeom prst="rect">
             <a:avLst/>
@@ -2042,7 +2018,7 @@
       </p:sp>
       <p:sp>
         <p:nvSpPr>
-          <p:cNvPr id="11" name="Shape 8"/>
+          <p:cNvPr id="10" name="Shape 7"/>
           <p:cNvSpPr/>
           <p:nvPr/>
         </p:nvSpPr>
@@ -2065,14 +2041,56 @@
       </p:sp>
       <p:sp>
         <p:nvSpPr>
+          <p:cNvPr id="11" name="Text 8"/>
+          <p:cNvSpPr/>
+          <p:nvPr/>
+        </p:nvSpPr>
+        <p:spPr>
+          <a:xfrm>
+            <a:off x="711200" y="4286504"/>
+            <a:ext cx="5892800" cy="812800"/>
+          </a:xfrm>
+          <a:prstGeom prst="rect">
+            <a:avLst/>
+          </a:prstGeom>
+          <a:noFill/>
+          <a:ln/>
+        </p:spPr>
+        <p:txBody>
+          <a:bodyPr wrap="square" lIns="0" tIns="0" rIns="0" bIns="0" rtlCol="0" anchor="t"/>
+          <a:lstStyle/>
+          <a:p>
+            <a:pPr algn="l" indent="0" marL="0">
+              <a:lnSpc>
+                <a:spcPct val="125000"/>
+              </a:lnSpc>
+              <a:buNone/>
+            </a:pPr>
+            <a:r>
+              <a:rPr lang="en-US" sz="1600" b="1" dirty="0">
+                <a:solidFill>
+                  <a:srgbClr val="FFFFFF"/>
+                </a:solidFill>
+                <a:latin typeface="Arial" pitchFamily="34" charset="0"/>
+                <a:ea typeface="Arial" pitchFamily="34" charset="-122"/>
+                <a:cs typeface="Arial" pitchFamily="34" charset="-120"/>
+              </a:rPr>
+              <a:t>UloX — mastering the utility of AI</a:t>
+            </a:r>
+            <a:endParaRPr lang="en-US" sz="1600" dirty="0"/>
+          </a:p>
+        </p:txBody>
+      </p:sp>
+      <p:sp>
+        <p:nvSpPr>
           <p:cNvPr id="12" name="Text 9"/>
           <p:cNvSpPr/>
           <p:nvPr/>
         </p:nvSpPr>
         <p:spPr>
           <a:xfrm>
-            <a:off x="711200" y="4286504"/>
-            <a:ext cx="5461000" cy="812800"/>
+            <a:off x="711200" y="4607306"/>
+            <a:ext cx="5892800" cy="584200"/>
           </a:xfrm>
           <a:prstGeom prst="rect">
             <a:avLst/>
@@ -2091,17 +2109,17 @@
               <a:buNone/>
             </a:pPr>
             <a:r>
-              <a:rPr lang="en-US" sz="1600" b="1" dirty="0">
-                <a:solidFill>
-                  <a:srgbClr val="FFFFFF"/>
-                </a:solidFill>
-                <a:latin typeface="Arial" pitchFamily="34" charset="0"/>
-                <a:ea typeface="Arial" pitchFamily="34" charset="-122"/>
-                <a:cs typeface="Arial" pitchFamily="34" charset="-120"/>
-              </a:rPr>
-              <a:t>UloX — mastering the utility of AI</a:t>
-            </a:r>
-            <a:endParaRPr lang="en-US" sz="1600" dirty="0"/>
+              <a:rPr lang="en-US" sz="1150" dirty="0">
+                <a:solidFill>
+                  <a:srgbClr val="A5ABB3"/>
+                </a:solidFill>
+                <a:latin typeface="Arial" pitchFamily="34" charset="0"/>
+                <a:ea typeface="Arial" pitchFamily="34" charset="-122"/>
+                <a:cs typeface="Arial" pitchFamily="34" charset="-120"/>
+              </a:rPr>
+              <a:t>The agentic engineering trainer. Free, and live in the browser.</a:t>
+            </a:r>
+            <a:endParaRPr lang="en-US" sz="1150" dirty="0"/>
           </a:p>
         </p:txBody>
       </p:sp>
@@ -2113,8 +2131,8 @@
         </p:nvSpPr>
         <p:spPr>
           <a:xfrm>
-            <a:off x="711200" y="4607306"/>
-            <a:ext cx="5461000" cy="584200"/>
+            <a:off x="711200" y="5262372"/>
+            <a:ext cx="5892800" cy="660400"/>
           </a:xfrm>
           <a:prstGeom prst="rect">
             <a:avLst/>
@@ -2133,30 +2151,52 @@
               <a:buNone/>
             </a:pPr>
             <a:r>
-              <a:rPr lang="en-US" sz="1150" dirty="0">
-                <a:solidFill>
-                  <a:srgbClr val="A5ABB3"/>
-                </a:solidFill>
-                <a:latin typeface="Arial" pitchFamily="34" charset="0"/>
-                <a:ea typeface="Arial" pitchFamily="34" charset="-122"/>
-                <a:cs typeface="Arial" pitchFamily="34" charset="-120"/>
-              </a:rPr>
-              <a:t>The agentic engineering trainer. Free, and live in the browser.</a:t>
-            </a:r>
-            <a:endParaRPr lang="en-US" sz="1150" dirty="0"/>
-          </a:p>
-        </p:txBody>
-      </p:sp>
-      <p:sp>
-        <p:nvSpPr>
-          <p:cNvPr id="14" name="Text 11"/>
-          <p:cNvSpPr/>
-          <p:nvPr/>
-        </p:nvSpPr>
-        <p:spPr>
-          <a:xfrm>
-            <a:off x="711200" y="5262372"/>
-            <a:ext cx="5461000" cy="660400"/>
+              <a:rPr lang="en-US" sz="1300" b="1" dirty="0">
+                <a:solidFill>
+                  <a:srgbClr val="EE1B24"/>
+                </a:solidFill>
+                <a:latin typeface="Arial" pitchFamily="34" charset="0"/>
+                <a:ea typeface="Arial" pitchFamily="34" charset="-122"/>
+                <a:cs typeface="Arial" pitchFamily="34" charset="-120"/>
+              </a:rPr>
+              <a:t>www.ulox.verionx.org</a:t>
+            </a:r>
+            <a:endParaRPr lang="en-US" sz="1300" dirty="0"/>
+          </a:p>
+        </p:txBody>
+      </p:sp>
+      <p:sp>
+        <p:nvSpPr>
+          <p:cNvPr id="14" name="Shape 11"/>
+          <p:cNvSpPr/>
+          <p:nvPr/>
+        </p:nvSpPr>
+        <p:spPr>
+          <a:xfrm>
+            <a:off x="7315200" y="6477000"/>
+            <a:ext cx="4876800" cy="381000"/>
+          </a:xfrm>
+          <a:prstGeom prst="rect">
+            <a:avLst/>
+          </a:prstGeom>
+          <a:solidFill>
+            <a:srgbClr val="0E0F11">
+              <a:alpha val="66000"/>
+            </a:srgbClr>
+          </a:solidFill>
+          <a:ln/>
+        </p:spPr>
+      </p:sp>
+      <p:sp>
+        <p:nvSpPr>
+          <p:cNvPr id="15" name="Text 12"/>
+          <p:cNvSpPr/>
+          <p:nvPr/>
+        </p:nvSpPr>
+        <p:spPr>
+          <a:xfrm>
+            <a:off x="7493000" y="6561074"/>
+            <a:ext cx="4521200" cy="431800"/>
           </a:xfrm>
           <a:prstGeom prst="rect">
             <a:avLst/>
@@ -2175,48 +2215,6 @@
               <a:buNone/>
             </a:pPr>
             <a:r>
-              <a:rPr lang="en-US" sz="1300" b="1" dirty="0">
-                <a:solidFill>
-                  <a:srgbClr val="EE1B24"/>
-                </a:solidFill>
-                <a:latin typeface="Arial" pitchFamily="34" charset="0"/>
-                <a:ea typeface="Arial" pitchFamily="34" charset="-122"/>
-                <a:cs typeface="Arial" pitchFamily="34" charset="-120"/>
-              </a:rPr>
-              <a:t>www.ulox.verionx.org</a:t>
-            </a:r>
-            <a:endParaRPr lang="en-US" sz="1300" dirty="0"/>
-          </a:p>
-        </p:txBody>
-      </p:sp>
-      <p:sp>
-        <p:nvSpPr>
-          <p:cNvPr id="15" name="Text 12"/>
-          <p:cNvSpPr/>
-          <p:nvPr/>
-        </p:nvSpPr>
-        <p:spPr>
-          <a:xfrm>
-            <a:off x="9271000" y="6395974"/>
-            <a:ext cx="2413000" cy="431800"/>
-          </a:xfrm>
-          <a:prstGeom prst="rect">
-            <a:avLst/>
-          </a:prstGeom>
-          <a:noFill/>
-          <a:ln/>
-        </p:spPr>
-        <p:txBody>
-          <a:bodyPr wrap="square" lIns="0" tIns="0" rIns="0" bIns="0" rtlCol="0" anchor="t"/>
-          <a:lstStyle/>
-          <a:p>
-            <a:pPr algn="r" indent="0" marL="0">
-              <a:lnSpc>
-                <a:spcPct val="125000"/>
-              </a:lnSpc>
-              <a:buNone/>
-            </a:pPr>
-            <a:r>
               <a:rPr lang="en-US" sz="850" dirty="0">
                 <a:solidFill>
                   <a:srgbClr val="CFD3D8"/>
@@ -2225,7 +2223,7 @@
                 <a:ea typeface="Arial" pitchFamily="34" charset="-122"/>
                 <a:cs typeface="Arial" pitchFamily="34" charset="-120"/>
               </a:rPr>
-              <a:t>Government College, Ikoyi</a:t>
+              <a:t>State High School</a:t>
             </a:r>
             <a:endParaRPr lang="en-US" sz="850" dirty="0"/>
           </a:p>
@@ -3772,7 +3770,7 @@
       </p:sp>
       <p:pic>
         <p:nvPicPr>
-          <p:cNvPr id="3" name="Image 0" descr="C:\Users\HP 830 G7 COREI5\OneDrive\Desktop\Composio\ulox\deck\assets\ikoyi-engaged.jpg">    </p:cNvPr>
+          <p:cNvPr id="3" name="Image 0" descr="C:\Users\HP 830 G7 COREI5\OneDrive\Desktop\Composio\ulox\deck\assets\close-assembly.jpg">    </p:cNvPr>
           <p:cNvPicPr>
             <a:picLocks noChangeAspect="1"/>
           </p:cNvPicPr>
@@ -3809,7 +3807,7 @@
           </a:prstGeom>
           <a:solidFill>
             <a:srgbClr val="0E0F11">
-              <a:alpha val="74000"/>
+              <a:alpha val="86000"/>
             </a:srgbClr>
           </a:solidFill>
           <a:ln/>
@@ -3818,6 +3816,28 @@
       <p:sp>
         <p:nvSpPr>
           <p:cNvPr id="5" name="Shape 2"/>
+          <p:cNvSpPr/>
+          <p:nvPr/>
+        </p:nvSpPr>
+        <p:spPr>
+          <a:xfrm>
+            <a:off x="0" y="0"/>
+            <a:ext cx="7874000" cy="6858000"/>
+          </a:xfrm>
+          <a:prstGeom prst="rect">
+            <a:avLst/>
+          </a:prstGeom>
+          <a:solidFill>
+            <a:srgbClr val="0E0F11">
+              <a:alpha val="45000"/>
+            </a:srgbClr>
+          </a:solidFill>
+          <a:ln/>
+        </p:spPr>
+      </p:sp>
+      <p:sp>
+        <p:nvSpPr>
+          <p:cNvPr id="6" name="Shape 3"/>
           <p:cNvSpPr/>
           <p:nvPr/>
         </p:nvSpPr>
@@ -3837,7 +3857,7 @@
       </p:sp>
       <p:sp>
         <p:nvSpPr>
-          <p:cNvPr id="6" name="Shape 3"/>
+          <p:cNvPr id="7" name="Shape 4"/>
           <p:cNvSpPr/>
           <p:nvPr/>
         </p:nvSpPr>
@@ -3859,7 +3879,7 @@
       </p:sp>
       <p:sp>
         <p:nvSpPr>
-          <p:cNvPr id="7" name="Shape 4"/>
+          <p:cNvPr id="8" name="Shape 5"/>
           <p:cNvSpPr/>
           <p:nvPr/>
         </p:nvSpPr>
@@ -3881,7 +3901,7 @@
       </p:sp>
       <p:sp>
         <p:nvSpPr>
-          <p:cNvPr id="8" name="Shape 5"/>
+          <p:cNvPr id="9" name="Shape 6"/>
           <p:cNvSpPr/>
           <p:nvPr/>
         </p:nvSpPr>
@@ -3903,7 +3923,7 @@
       </p:sp>
       <p:sp>
         <p:nvSpPr>
-          <p:cNvPr id="9" name="Shape 6"/>
+          <p:cNvPr id="10" name="Shape 7"/>
           <p:cNvSpPr/>
           <p:nvPr/>
         </p:nvSpPr>
@@ -3925,7 +3945,7 @@
       </p:sp>
       <p:sp>
         <p:nvSpPr>
-          <p:cNvPr id="10" name="Shape 7"/>
+          <p:cNvPr id="11" name="Shape 8"/>
           <p:cNvSpPr/>
           <p:nvPr/>
         </p:nvSpPr>
@@ -3947,7 +3967,7 @@
       </p:sp>
       <p:sp>
         <p:nvSpPr>
-          <p:cNvPr id="11" name="Shape 8"/>
+          <p:cNvPr id="12" name="Shape 9"/>
           <p:cNvSpPr/>
           <p:nvPr/>
         </p:nvSpPr>
@@ -3969,7 +3989,7 @@
       </p:sp>
       <p:sp>
         <p:nvSpPr>
-          <p:cNvPr id="12" name="Text 9"/>
+          <p:cNvPr id="13" name="Text 10"/>
           <p:cNvSpPr/>
           <p:nvPr/>
         </p:nvSpPr>
@@ -4011,7 +4031,7 @@
       </p:sp>
       <p:sp>
         <p:nvSpPr>
-          <p:cNvPr id="13" name="Text 10"/>
+          <p:cNvPr id="14" name="Text 11"/>
           <p:cNvSpPr/>
           <p:nvPr/>
         </p:nvSpPr>
@@ -4053,7 +4073,7 @@
       </p:sp>
       <p:sp>
         <p:nvSpPr>
-          <p:cNvPr id="14" name="Text 11"/>
+          <p:cNvPr id="15" name="Text 12"/>
           <p:cNvSpPr/>
           <p:nvPr/>
         </p:nvSpPr>
@@ -4095,7 +4115,7 @@
       </p:sp>
       <p:sp>
         <p:nvSpPr>
-          <p:cNvPr id="15" name="Shape 12"/>
+          <p:cNvPr id="16" name="Shape 13"/>
           <p:cNvSpPr/>
           <p:nvPr/>
         </p:nvSpPr>
@@ -4118,7 +4138,7 @@
       </p:sp>
       <p:sp>
         <p:nvSpPr>
-          <p:cNvPr id="16" name="Text 13"/>
+          <p:cNvPr id="17" name="Text 14"/>
           <p:cNvSpPr/>
           <p:nvPr/>
         </p:nvSpPr>
@@ -4160,7 +4180,7 @@
       </p:sp>
       <p:sp>
         <p:nvSpPr>
-          <p:cNvPr id="17" name="Text 14"/>
+          <p:cNvPr id="18" name="Text 15"/>
           <p:cNvSpPr/>
           <p:nvPr/>
         </p:nvSpPr>
@@ -4202,7 +4222,7 @@
       </p:sp>
       <p:sp>
         <p:nvSpPr>
-          <p:cNvPr id="18" name="Text 15"/>
+          <p:cNvPr id="19" name="Text 16"/>
           <p:cNvSpPr/>
           <p:nvPr/>
         </p:nvSpPr>
@@ -4244,7 +4264,7 @@
       </p:sp>
       <p:sp>
         <p:nvSpPr>
-          <p:cNvPr id="19" name="Text 16"/>
+          <p:cNvPr id="20" name="Text 17"/>
           <p:cNvSpPr/>
           <p:nvPr/>
         </p:nvSpPr>
@@ -4286,7 +4306,7 @@
       </p:sp>
       <p:sp>
         <p:nvSpPr>
-          <p:cNvPr id="20" name="Text 17"/>
+          <p:cNvPr id="21" name="Text 18"/>
           <p:cNvSpPr/>
           <p:nvPr/>
         </p:nvSpPr>
@@ -4328,7 +4348,7 @@
       </p:sp>
       <p:sp>
         <p:nvSpPr>
-          <p:cNvPr id="21" name="Text 18"/>
+          <p:cNvPr id="22" name="Text 19"/>
           <p:cNvSpPr/>
           <p:nvPr/>
         </p:nvSpPr>
@@ -5795,7 +5815,7 @@
       </p:sp>
       <p:pic>
         <p:nvPicPr>
-          <p:cNvPr id="13" name="Image 0" descr="C:\Users\HP 830 G7 COREI5\OneDrive\Desktop\Composio\ulox\deck\assets\ikeja-student.jpg">    </p:cNvPr>
+          <p:cNvPr id="13" name="Image 0" descr="C:\Users\HP 830 G7 COREI5\OneDrive\Desktop\Composio\ulox\deck\assets\mission-teaching.jpg">    </p:cNvPr>
           <p:cNvPicPr>
             <a:picLocks noChangeAspect="1"/>
           </p:cNvPicPr>
@@ -5874,7 +5894,7 @@
                 <a:ea typeface="Arial" pitchFamily="34" charset="-122"/>
                 <a:cs typeface="Arial" pitchFamily="34" charset="-120"/>
               </a:rPr>
-              <a:t>Ikeja High School</a:t>
+              <a:t>Prominent Tech Learning Hub</a:t>
             </a:r>
             <a:endParaRPr lang="en-US" sz="850" dirty="0"/>
           </a:p>
@@ -12005,7 +12025,7 @@
       </p:sp>
       <p:pic>
         <p:nvPicPr>
-          <p:cNvPr id="5" name="Image 0" descr="C:\Users\HP 830 G7 COREI5\OneDrive\Desktop\Composio\ulox\deck\assets\owerri-assembly.jpg">    </p:cNvPr>
+          <p:cNvPr id="5" name="Image 0" descr="C:\Users\HP 830 G7 COREI5\OneDrive\Desktop\Composio\ulox\deck\assets\proof-owerri.jpg">    </p:cNvPr>
           <p:cNvPicPr>
             <a:picLocks noChangeAspect="1"/>
           </p:cNvPicPr>
@@ -12019,7 +12039,7 @@
         <p:spPr>
           <a:xfrm>
             <a:off x="711200" y="1600200"/>
-            <a:ext cx="2489200" cy="1498600"/>
+            <a:ext cx="2540000" cy="1574800"/>
           </a:xfrm>
           <a:prstGeom prst="rect">
             <a:avLst/>
@@ -12034,8 +12054,8 @@
         </p:nvSpPr>
         <p:spPr>
           <a:xfrm>
-            <a:off x="711200" y="2768600"/>
-            <a:ext cx="2489200" cy="330200"/>
+            <a:off x="711200" y="2844800"/>
+            <a:ext cx="2540000" cy="330200"/>
           </a:xfrm>
           <a:prstGeom prst="rect">
             <a:avLst/>
@@ -12056,8 +12076,8 @@
         </p:nvSpPr>
         <p:spPr>
           <a:xfrm>
-            <a:off x="838200" y="2827274"/>
-            <a:ext cx="2235200" cy="431800"/>
+            <a:off x="838200" y="2903474"/>
+            <a:ext cx="2286000" cy="431800"/>
           </a:xfrm>
           <a:prstGeom prst="rect">
             <a:avLst/>
@@ -12092,7 +12112,7 @@
       </p:sp>
       <p:pic>
         <p:nvPicPr>
-          <p:cNvPr id="8" name="Image 1" descr="C:\Users\HP 830 G7 COREI5\OneDrive\Desktop\Composio\ulox\deck\assets\calabar-lineup.jpg">    </p:cNvPr>
+          <p:cNvPr id="8" name="Image 1" descr="C:\Users\HP 830 G7 COREI5\OneDrive\Desktop\Composio\ulox\deck\assets\proof-calabar.jpg">    </p:cNvPr>
           <p:cNvPicPr>
             <a:picLocks noChangeAspect="1"/>
           </p:cNvPicPr>
@@ -12105,8 +12125,8 @@
         </p:blipFill>
         <p:spPr>
           <a:xfrm>
-            <a:off x="3327400" y="1600200"/>
-            <a:ext cx="2489200" cy="1498600"/>
+            <a:off x="3454400" y="1600200"/>
+            <a:ext cx="2540000" cy="1574800"/>
           </a:xfrm>
           <a:prstGeom prst="rect">
             <a:avLst/>
@@ -12121,8 +12141,8 @@
         </p:nvSpPr>
         <p:spPr>
           <a:xfrm>
-            <a:off x="3327400" y="2768600"/>
-            <a:ext cx="2489200" cy="330200"/>
+            <a:off x="3454400" y="2844800"/>
+            <a:ext cx="2540000" cy="330200"/>
           </a:xfrm>
           <a:prstGeom prst="rect">
             <a:avLst/>
@@ -12143,8 +12163,8 @@
         </p:nvSpPr>
         <p:spPr>
           <a:xfrm>
-            <a:off x="3454400" y="2827274"/>
-            <a:ext cx="2235200" cy="431800"/>
+            <a:off x="3581400" y="2903474"/>
+            <a:ext cx="2286000" cy="431800"/>
           </a:xfrm>
           <a:prstGeom prst="rect">
             <a:avLst/>
@@ -12179,7 +12199,7 @@
       </p:sp>
       <p:pic>
         <p:nvPicPr>
-          <p:cNvPr id="11" name="Image 2" descr="C:\Users\HP 830 G7 COREI5\OneDrive\Desktop\Composio\ulox\deck\assets\activation-assembly.jpg">    </p:cNvPr>
+          <p:cNvPr id="11" name="Image 2" descr="C:\Users\HP 830 G7 COREI5\OneDrive\Desktop\Composio\ulox\deck\assets\proof-statehigh.jpg">    </p:cNvPr>
           <p:cNvPicPr>
             <a:picLocks noChangeAspect="1"/>
           </p:cNvPicPr>
@@ -12192,8 +12212,8 @@
         </p:blipFill>
         <p:spPr>
           <a:xfrm>
-            <a:off x="5943600" y="1600200"/>
-            <a:ext cx="2489200" cy="1498600"/>
+            <a:off x="6197600" y="1600200"/>
+            <a:ext cx="2540000" cy="1574800"/>
           </a:xfrm>
           <a:prstGeom prst="rect">
             <a:avLst/>
@@ -12208,8 +12228,8 @@
         </p:nvSpPr>
         <p:spPr>
           <a:xfrm>
-            <a:off x="5943600" y="2768600"/>
-            <a:ext cx="2489200" cy="330200"/>
+            <a:off x="6197600" y="2844800"/>
+            <a:ext cx="2540000" cy="330200"/>
           </a:xfrm>
           <a:prstGeom prst="rect">
             <a:avLst/>
@@ -12230,8 +12250,8 @@
         </p:nvSpPr>
         <p:spPr>
           <a:xfrm>
-            <a:off x="6070600" y="2827274"/>
-            <a:ext cx="2235200" cy="431800"/>
+            <a:off x="6324600" y="2903474"/>
+            <a:ext cx="2286000" cy="431800"/>
           </a:xfrm>
           <a:prstGeom prst="rect">
             <a:avLst/>
@@ -12258,7 +12278,7 @@
                 <a:ea typeface="Arial" pitchFamily="34" charset="-122"/>
                 <a:cs typeface="Arial" pitchFamily="34" charset="-120"/>
               </a:rPr>
-              <a:t>Secondary school activation</a:t>
+              <a:t>State High School</a:t>
             </a:r>
             <a:endParaRPr lang="en-US" sz="850" dirty="0"/>
           </a:p>
@@ -12266,7 +12286,7 @@
       </p:sp>
       <p:pic>
         <p:nvPicPr>
-          <p:cNvPr id="14" name="Image 3" descr="C:\Users\HP 830 G7 COREI5\OneDrive\Desktop\Composio\ulox\deck\assets\community-outreach.jpg">    </p:cNvPr>
+          <p:cNvPr id="14" name="Image 3" descr="C:\Users\HP 830 G7 COREI5\OneDrive\Desktop\Composio\ulox\deck\assets\proof-community.jpg">    </p:cNvPr>
           <p:cNvPicPr>
             <a:picLocks noChangeAspect="1"/>
           </p:cNvPicPr>
@@ -12279,8 +12299,8 @@
         </p:blipFill>
         <p:spPr>
           <a:xfrm>
-            <a:off x="8559800" y="1600200"/>
-            <a:ext cx="2921000" cy="1498600"/>
+            <a:off x="8940800" y="1600200"/>
+            <a:ext cx="2540000" cy="1574800"/>
           </a:xfrm>
           <a:prstGeom prst="rect">
             <a:avLst/>
@@ -12295,8 +12315,8 @@
         </p:nvSpPr>
         <p:spPr>
           <a:xfrm>
-            <a:off x="8559800" y="2768600"/>
-            <a:ext cx="2921000" cy="330200"/>
+            <a:off x="8940800" y="2844800"/>
+            <a:ext cx="2540000" cy="330200"/>
           </a:xfrm>
           <a:prstGeom prst="rect">
             <a:avLst/>
@@ -12317,8 +12337,8 @@
         </p:nvSpPr>
         <p:spPr>
           <a:xfrm>
-            <a:off x="8686800" y="2827274"/>
-            <a:ext cx="2667000" cy="431800"/>
+            <a:off x="9067800" y="2903474"/>
+            <a:ext cx="2286000" cy="431800"/>
           </a:xfrm>
           <a:prstGeom prst="rect">
             <a:avLst/>
@@ -12359,7 +12379,7 @@
         </p:nvSpPr>
         <p:spPr>
           <a:xfrm>
-            <a:off x="711200" y="3293618"/>
+            <a:off x="711200" y="3369818"/>
             <a:ext cx="7112000" cy="482600"/>
           </a:xfrm>
           <a:prstGeom prst="rect">
@@ -12401,7 +12421,7 @@
         </p:nvSpPr>
         <p:spPr>
           <a:xfrm>
-            <a:off x="711200" y="3521456"/>
+            <a:off x="711200" y="3597656"/>
             <a:ext cx="2011680" cy="1219200"/>
           </a:xfrm>
           <a:prstGeom prst="rect">
@@ -12443,7 +12463,7 @@
         </p:nvSpPr>
         <p:spPr>
           <a:xfrm>
-            <a:off x="711200" y="3952240"/>
+            <a:off x="711200" y="4028440"/>
             <a:ext cx="2011680" cy="528320"/>
           </a:xfrm>
           <a:prstGeom prst="rect">
@@ -12485,7 +12505,7 @@
         </p:nvSpPr>
         <p:spPr>
           <a:xfrm>
-            <a:off x="2900680" y="3521456"/>
+            <a:off x="2900680" y="3597656"/>
             <a:ext cx="2011680" cy="1219200"/>
           </a:xfrm>
           <a:prstGeom prst="rect">
@@ -12527,7 +12547,7 @@
         </p:nvSpPr>
         <p:spPr>
           <a:xfrm>
-            <a:off x="2900680" y="3952240"/>
+            <a:off x="2900680" y="4028440"/>
             <a:ext cx="2011680" cy="528320"/>
           </a:xfrm>
           <a:prstGeom prst="rect">
@@ -12569,7 +12589,7 @@
         </p:nvSpPr>
         <p:spPr>
           <a:xfrm>
-            <a:off x="5090160" y="3521456"/>
+            <a:off x="5090160" y="3597656"/>
             <a:ext cx="2011680" cy="1219200"/>
           </a:xfrm>
           <a:prstGeom prst="rect">
@@ -12611,7 +12631,7 @@
         </p:nvSpPr>
         <p:spPr>
           <a:xfrm>
-            <a:off x="5090160" y="3952240"/>
+            <a:off x="5090160" y="4028440"/>
             <a:ext cx="2011680" cy="528320"/>
           </a:xfrm>
           <a:prstGeom prst="rect">
@@ -12653,7 +12673,7 @@
         </p:nvSpPr>
         <p:spPr>
           <a:xfrm>
-            <a:off x="7279640" y="3521456"/>
+            <a:off x="7279640" y="3597656"/>
             <a:ext cx="2011680" cy="1219200"/>
           </a:xfrm>
           <a:prstGeom prst="rect">
@@ -12695,7 +12715,7 @@
         </p:nvSpPr>
         <p:spPr>
           <a:xfrm>
-            <a:off x="7279640" y="3952240"/>
+            <a:off x="7279640" y="4028440"/>
             <a:ext cx="2011680" cy="528320"/>
           </a:xfrm>
           <a:prstGeom prst="rect">
@@ -12737,7 +12757,7 @@
         </p:nvSpPr>
         <p:spPr>
           <a:xfrm>
-            <a:off x="9469120" y="3521456"/>
+            <a:off x="9469120" y="3597656"/>
             <a:ext cx="2011680" cy="1219200"/>
           </a:xfrm>
           <a:prstGeom prst="rect">
@@ -12779,7 +12799,7 @@
         </p:nvSpPr>
         <p:spPr>
           <a:xfrm>
-            <a:off x="9469120" y="3952240"/>
+            <a:off x="9469120" y="4028440"/>
             <a:ext cx="2011680" cy="528320"/>
           </a:xfrm>
           <a:prstGeom prst="rect">
